--- a/assets/figures-editable/c3-c4/c4-e14.pptx
+++ b/assets/figures-editable/c3-c4/c4-e14.pptx
@@ -3104,8 +3104,8 @@
         </p:nvSpPr>
         <p:spPr>
           <a:xfrm>
-            <a:off x="274320" y="137160"/>
-            <a:ext cx="11612880" cy="365760"/>
+            <a:off x="274320" y="118872"/>
+            <a:ext cx="11612880" cy="340105"/>
           </a:xfrm>
           <a:prstGeom prst="rect">
             <a:avLst/>
@@ -3114,7 +3114,7 @@
           <a:effectLst/>
         </p:spPr>
         <p:txBody>
-          <a:bodyPr wrap="square" lIns="27432" rIns="27432" tIns="18288" bIns="18288" anchor="ctr">
+          <a:bodyPr wrap="none" lIns="18288" rIns="18288" tIns="18288" bIns="18288" anchor="t">
             <a:spAutoFit/>
           </a:bodyPr>
           <a:lstStyle/>
@@ -3125,7 +3125,7 @@
               </a:spcAft>
             </a:pPr>
             <a:r>
-              <a:rPr sz="2100" b="0" i="0">
+              <a:rPr sz="1900" b="1" i="0">
                 <a:solidFill>
                   <a:srgbClr val="8EDBD4"/>
                 </a:solidFill>
@@ -3136,248 +3136,446 @@
           </a:p>
         </p:txBody>
       </p:sp>
-      <p:cxnSp>
-        <p:nvCxnSpPr>
-          <p:cNvPr id="3" name="C4-E14 line 1" descr="sci-ppt:o001"/>
-          <p:cNvCxnSpPr/>
+      <p:sp>
+        <p:nvSpPr>
+          <p:cNvPr id="3" name="C4-E14 text 1" descr="sci-ppt:o001"/>
+          <p:cNvSpPr txBox="1"/>
           <p:nvPr/>
-        </p:nvCxnSpPr>
-        <p:spPr>
-          <a:xfrm>
-            <a:off x="731520" y="2880360"/>
-            <a:ext cx="6675120" cy="0"/>
-          </a:xfrm>
-          <a:prstGeom prst="line">
+        </p:nvSpPr>
+        <p:spPr>
+          <a:xfrm>
+            <a:off x="457200" y="914400"/>
+            <a:ext cx="11247120" cy="254889"/>
+          </a:xfrm>
+          <a:prstGeom prst="rect">
             <a:avLst/>
           </a:prstGeom>
-          <a:ln w="25400">
-            <a:solidFill>
-              <a:srgbClr val="B4C7D2"/>
-            </a:solidFill>
-          </a:ln>
+          <a:noFill/>
           <a:effectLst/>
         </p:spPr>
-      </p:cxnSp>
-      <p:cxnSp>
-        <p:nvCxnSpPr>
-          <p:cNvPr id="4" name="C4-E14 line 2" descr="sci-ppt:o002"/>
-          <p:cNvCxnSpPr/>
+        <p:txBody>
+          <a:bodyPr wrap="none" lIns="18288" rIns="18288" tIns="18288" bIns="18288" anchor="t">
+            <a:spAutoFit/>
+          </a:bodyPr>
+          <a:lstStyle/>
+          <a:p>
+            <a:pPr algn="l">
+              <a:spcAft>
+                <a:spcPts val="0"/>
+              </a:spcAft>
+            </a:pPr>
+            <a:r>
+              <a:rPr sz="1350" b="1" i="0">
+                <a:solidFill>
+                  <a:srgbClr val="8EDBD4"/>
+                </a:solidFill>
+                <a:latin typeface="Arial"/>
+              </a:rPr>
+              <a:t>First pair of integrations: regularity removes C₁</a:t>
+            </a:r>
+          </a:p>
+        </p:txBody>
+      </p:sp>
+      <p:sp>
+        <p:nvSpPr>
+          <p:cNvPr id="4" name="C4-E14 text 2" descr="sci-ppt:o002"/>
+          <p:cNvSpPr txBox="1"/>
           <p:nvPr/>
-        </p:nvCxnSpPr>
-        <p:spPr>
-          <a:xfrm flipV="1">
-            <a:off x="1005840" y="2876570"/>
-            <a:ext cx="76581" cy="3790"/>
-          </a:xfrm>
-          <a:prstGeom prst="line">
+        </p:nvSpPr>
+        <p:spPr>
+          <a:xfrm>
+            <a:off x="548640" y="1417320"/>
+            <a:ext cx="2834640" cy="231648"/>
+          </a:xfrm>
+          <a:prstGeom prst="rect">
             <a:avLst/>
           </a:prstGeom>
-          <a:ln w="25400">
-            <a:solidFill>
-              <a:srgbClr val="8EDBD4"/>
-            </a:solidFill>
-          </a:ln>
+          <a:noFill/>
           <a:effectLst/>
         </p:spPr>
-      </p:cxnSp>
-      <p:cxnSp>
-        <p:nvCxnSpPr>
-          <p:cNvPr id="5" name="C4-E14 line 3" descr="sci-ppt:o003"/>
-          <p:cNvCxnSpPr/>
+        <p:txBody>
+          <a:bodyPr wrap="none" lIns="18288" rIns="18288" tIns="18288" bIns="18288" anchor="t">
+            <a:spAutoFit/>
+          </a:bodyPr>
+          <a:lstStyle/>
+          <a:p>
+            <a:pPr algn="l">
+              <a:spcAft>
+                <a:spcPts val="0"/>
+              </a:spcAft>
+            </a:pPr>
+            <a:r>
+              <a:rPr sz="1200" b="1" i="0">
+                <a:solidFill>
+                  <a:srgbClr val="7FC8F8"/>
+                </a:solidFill>
+                <a:latin typeface="Arial"/>
+              </a:rPr>
+              <a:t>start</a:t>
+            </a:r>
+          </a:p>
+        </p:txBody>
+      </p:sp>
+      <p:sp>
+        <p:nvSpPr>
+          <p:cNvPr id="5" name="C4-E14 text 3" descr="sci-ppt:o003"/>
+          <p:cNvSpPr txBox="1"/>
           <p:nvPr/>
-        </p:nvCxnSpPr>
-        <p:spPr>
-          <a:xfrm flipV="1">
-            <a:off x="1082421" y="2865582"/>
-            <a:ext cx="76581" cy="10988"/>
-          </a:xfrm>
-          <a:prstGeom prst="line">
+        </p:nvSpPr>
+        <p:spPr>
+          <a:xfrm>
+            <a:off x="3474720" y="1417320"/>
+            <a:ext cx="4572000" cy="247142"/>
+          </a:xfrm>
+          <a:prstGeom prst="rect">
             <a:avLst/>
           </a:prstGeom>
-          <a:ln w="25400">
-            <a:solidFill>
-              <a:srgbClr val="8EDBD4"/>
-            </a:solidFill>
-          </a:ln>
+          <a:noFill/>
           <a:effectLst/>
         </p:spPr>
-      </p:cxnSp>
-      <p:cxnSp>
-        <p:nvCxnSpPr>
-          <p:cNvPr id="6" name="C4-E14 line 4" descr="sci-ppt:o004"/>
-          <p:cNvCxnSpPr/>
+        <p:txBody>
+          <a:bodyPr wrap="none" lIns="18288" rIns="18288" tIns="18288" bIns="18288" anchor="t">
+            <a:spAutoFit/>
+          </a:bodyPr>
+          <a:lstStyle/>
+          <a:p>
+            <a:pPr algn="l">
+              <a:spcAft>
+                <a:spcPts val="0"/>
+              </a:spcAft>
+            </a:pPr>
+            <a:r>
+              <a:rPr sz="1300" b="1" i="0">
+                <a:solidFill>
+                  <a:srgbClr val="E7F0F3"/>
+                </a:solidFill>
+                <a:latin typeface="Arial"/>
+              </a:rPr>
+              <a:t>d/dr (r g′) = p₀ r / D_f</a:t>
+            </a:r>
+          </a:p>
+        </p:txBody>
+      </p:sp>
+      <p:sp>
+        <p:nvSpPr>
+          <p:cNvPr id="6" name="C4-E14 text 4" descr="sci-ppt:o004"/>
+          <p:cNvSpPr txBox="1"/>
           <p:nvPr/>
-        </p:nvCxnSpPr>
-        <p:spPr>
-          <a:xfrm flipV="1">
-            <a:off x="1159002" y="2847958"/>
-            <a:ext cx="76581" cy="17624"/>
-          </a:xfrm>
-          <a:prstGeom prst="line">
+        </p:nvSpPr>
+        <p:spPr>
+          <a:xfrm>
+            <a:off x="548640" y="2075688"/>
+            <a:ext cx="2834640" cy="231648"/>
+          </a:xfrm>
+          <a:prstGeom prst="rect">
             <a:avLst/>
           </a:prstGeom>
-          <a:ln w="25400">
-            <a:solidFill>
-              <a:srgbClr val="8EDBD4"/>
-            </a:solidFill>
-          </a:ln>
+          <a:noFill/>
           <a:effectLst/>
         </p:spPr>
-      </p:cxnSp>
-      <p:cxnSp>
-        <p:nvCxnSpPr>
-          <p:cNvPr id="7" name="C4-E14 line 5" descr="sci-ppt:o005"/>
-          <p:cNvCxnSpPr/>
+        <p:txBody>
+          <a:bodyPr wrap="none" lIns="18288" rIns="18288" tIns="18288" bIns="18288" anchor="t">
+            <a:spAutoFit/>
+          </a:bodyPr>
+          <a:lstStyle/>
+          <a:p>
+            <a:pPr algn="l">
+              <a:spcAft>
+                <a:spcPts val="0"/>
+              </a:spcAft>
+            </a:pPr>
+            <a:r>
+              <a:rPr sz="1200" b="1" i="0">
+                <a:solidFill>
+                  <a:srgbClr val="7FC8F8"/>
+                </a:solidFill>
+                <a:latin typeface="Arial"/>
+              </a:rPr>
+              <a:t>integrate</a:t>
+            </a:r>
+          </a:p>
+        </p:txBody>
+      </p:sp>
+      <p:sp>
+        <p:nvSpPr>
+          <p:cNvPr id="7" name="C4-E14 text 5" descr="sci-ppt:o005"/>
+          <p:cNvSpPr txBox="1"/>
           <p:nvPr/>
-        </p:nvCxnSpPr>
-        <p:spPr>
-          <a:xfrm flipV="1">
-            <a:off x="1235583" y="2824243"/>
-            <a:ext cx="76581" cy="23715"/>
-          </a:xfrm>
-          <a:prstGeom prst="line">
+        </p:nvSpPr>
+        <p:spPr>
+          <a:xfrm>
+            <a:off x="3474720" y="2075688"/>
+            <a:ext cx="4572000" cy="247142"/>
+          </a:xfrm>
+          <a:prstGeom prst="rect">
             <a:avLst/>
           </a:prstGeom>
-          <a:ln w="25400">
-            <a:solidFill>
-              <a:srgbClr val="8EDBD4"/>
-            </a:solidFill>
-          </a:ln>
+          <a:noFill/>
           <a:effectLst/>
         </p:spPr>
-      </p:cxnSp>
-      <p:cxnSp>
-        <p:nvCxnSpPr>
-          <p:cNvPr id="8" name="C4-E14 line 6" descr="sci-ppt:o006"/>
-          <p:cNvCxnSpPr/>
+        <p:txBody>
+          <a:bodyPr wrap="none" lIns="18288" rIns="18288" tIns="18288" bIns="18288" anchor="t">
+            <a:spAutoFit/>
+          </a:bodyPr>
+          <a:lstStyle/>
+          <a:p>
+            <a:pPr algn="l">
+              <a:spcAft>
+                <a:spcPts val="0"/>
+              </a:spcAft>
+            </a:pPr>
+            <a:r>
+              <a:rPr sz="1300" b="1" i="0">
+                <a:solidFill>
+                  <a:srgbClr val="E7F0F3"/>
+                </a:solidFill>
+                <a:latin typeface="Arial"/>
+              </a:rPr>
+              <a:t>r g′ = p₀ r² / (2D_f) + C₁</a:t>
+            </a:r>
+          </a:p>
+        </p:txBody>
+      </p:sp>
+      <p:sp>
+        <p:nvSpPr>
+          <p:cNvPr id="8" name="C4-E14 text 6" descr="sci-ppt:o006"/>
+          <p:cNvSpPr txBox="1"/>
           <p:nvPr/>
-        </p:nvCxnSpPr>
-        <p:spPr>
-          <a:xfrm flipV="1">
-            <a:off x="1312164" y="2794969"/>
-            <a:ext cx="76581" cy="29274"/>
-          </a:xfrm>
-          <a:prstGeom prst="line">
+        </p:nvSpPr>
+        <p:spPr>
+          <a:xfrm>
+            <a:off x="548640" y="2734056"/>
+            <a:ext cx="2834640" cy="231648"/>
+          </a:xfrm>
+          <a:prstGeom prst="rect">
             <a:avLst/>
           </a:prstGeom>
-          <a:ln w="25400">
-            <a:solidFill>
-              <a:srgbClr val="8EDBD4"/>
-            </a:solidFill>
-          </a:ln>
+          <a:noFill/>
           <a:effectLst/>
         </p:spPr>
-      </p:cxnSp>
-      <p:cxnSp>
-        <p:nvCxnSpPr>
-          <p:cNvPr id="9" name="C4-E14 line 7" descr="sci-ppt:o007"/>
-          <p:cNvCxnSpPr/>
+        <p:txBody>
+          <a:bodyPr wrap="none" lIns="18288" rIns="18288" tIns="18288" bIns="18288" anchor="t">
+            <a:spAutoFit/>
+          </a:bodyPr>
+          <a:lstStyle/>
+          <a:p>
+            <a:pPr algn="l">
+              <a:spcAft>
+                <a:spcPts val="0"/>
+              </a:spcAft>
+            </a:pPr>
+            <a:r>
+              <a:rPr sz="1200" b="1" i="0">
+                <a:solidFill>
+                  <a:srgbClr val="F2B880"/>
+                </a:solidFill>
+                <a:latin typeface="Arial"/>
+              </a:rPr>
+              <a:t>divide by r</a:t>
+            </a:r>
+          </a:p>
+        </p:txBody>
+      </p:sp>
+      <p:sp>
+        <p:nvSpPr>
+          <p:cNvPr id="9" name="C4-E14 text 7" descr="sci-ppt:o007"/>
+          <p:cNvSpPr txBox="1"/>
           <p:nvPr/>
-        </p:nvCxnSpPr>
-        <p:spPr>
-          <a:xfrm flipV="1">
-            <a:off x="1388745" y="2760655"/>
-            <a:ext cx="76581" cy="34314"/>
-          </a:xfrm>
-          <a:prstGeom prst="line">
+        </p:nvSpPr>
+        <p:spPr>
+          <a:xfrm>
+            <a:off x="3474720" y="2734056"/>
+            <a:ext cx="4572000" cy="247142"/>
+          </a:xfrm>
+          <a:prstGeom prst="rect">
             <a:avLst/>
           </a:prstGeom>
-          <a:ln w="25400">
-            <a:solidFill>
-              <a:srgbClr val="8EDBD4"/>
-            </a:solidFill>
-          </a:ln>
+          <a:noFill/>
           <a:effectLst/>
         </p:spPr>
-      </p:cxnSp>
-      <p:cxnSp>
-        <p:nvCxnSpPr>
-          <p:cNvPr id="10" name="C4-E14 line 8" descr="sci-ppt:o008"/>
-          <p:cNvCxnSpPr/>
+        <p:txBody>
+          <a:bodyPr wrap="none" lIns="18288" rIns="18288" tIns="18288" bIns="18288" anchor="t">
+            <a:spAutoFit/>
+          </a:bodyPr>
+          <a:lstStyle/>
+          <a:p>
+            <a:pPr algn="l">
+              <a:spcAft>
+                <a:spcPts val="0"/>
+              </a:spcAft>
+            </a:pPr>
+            <a:r>
+              <a:rPr sz="1300" b="1" i="0">
+                <a:solidFill>
+                  <a:srgbClr val="E7F0F3"/>
+                </a:solidFill>
+                <a:latin typeface="Arial"/>
+              </a:rPr>
+              <a:t>g′ = p₀ r / (2D_f) + C₁ / r</a:t>
+            </a:r>
+          </a:p>
+        </p:txBody>
+      </p:sp>
+      <p:sp>
+        <p:nvSpPr>
+          <p:cNvPr id="10" name="C4-E14 text 8" descr="sci-ppt:o008"/>
+          <p:cNvSpPr txBox="1"/>
           <p:nvPr/>
-        </p:nvCxnSpPr>
-        <p:spPr>
-          <a:xfrm flipV="1">
-            <a:off x="1465326" y="2721802"/>
-            <a:ext cx="76581" cy="38853"/>
-          </a:xfrm>
-          <a:prstGeom prst="line">
+        </p:nvSpPr>
+        <p:spPr>
+          <a:xfrm>
+            <a:off x="548640" y="3392424"/>
+            <a:ext cx="2834640" cy="231648"/>
+          </a:xfrm>
+          <a:prstGeom prst="rect">
             <a:avLst/>
           </a:prstGeom>
-          <a:ln w="25400">
-            <a:solidFill>
-              <a:srgbClr val="8EDBD4"/>
-            </a:solidFill>
-          </a:ln>
+          <a:noFill/>
           <a:effectLst/>
         </p:spPr>
-      </p:cxnSp>
-      <p:cxnSp>
-        <p:nvCxnSpPr>
-          <p:cNvPr id="11" name="C4-E14 line 9" descr="sci-ppt:o009"/>
-          <p:cNvCxnSpPr/>
+        <p:txBody>
+          <a:bodyPr wrap="none" lIns="18288" rIns="18288" tIns="18288" bIns="18288" anchor="t">
+            <a:spAutoFit/>
+          </a:bodyPr>
+          <a:lstStyle/>
+          <a:p>
+            <a:pPr algn="l">
+              <a:spcAft>
+                <a:spcPts val="0"/>
+              </a:spcAft>
+            </a:pPr>
+            <a:r>
+              <a:rPr sz="1200" b="1" i="0">
+                <a:solidFill>
+                  <a:srgbClr val="F28BA0"/>
+                </a:solidFill>
+                <a:latin typeface="Arial"/>
+              </a:rPr>
+              <a:t>regular at r = 0 ⇒ C₁ = 0</a:t>
+            </a:r>
+          </a:p>
+        </p:txBody>
+      </p:sp>
+      <p:sp>
+        <p:nvSpPr>
+          <p:cNvPr id="11" name="C4-E14 text 9" descr="sci-ppt:o009"/>
+          <p:cNvSpPr txBox="1"/>
           <p:nvPr/>
-        </p:nvCxnSpPr>
-        <p:spPr>
-          <a:xfrm flipV="1">
-            <a:off x="1541907" y="2678899"/>
-            <a:ext cx="76581" cy="42903"/>
-          </a:xfrm>
-          <a:prstGeom prst="line">
+        </p:nvSpPr>
+        <p:spPr>
+          <a:xfrm>
+            <a:off x="3474720" y="3392424"/>
+            <a:ext cx="4572000" cy="247142"/>
+          </a:xfrm>
+          <a:prstGeom prst="rect">
             <a:avLst/>
           </a:prstGeom>
-          <a:ln w="25400">
-            <a:solidFill>
-              <a:srgbClr val="8EDBD4"/>
-            </a:solidFill>
-          </a:ln>
+          <a:noFill/>
           <a:effectLst/>
         </p:spPr>
-      </p:cxnSp>
-      <p:cxnSp>
-        <p:nvCxnSpPr>
-          <p:cNvPr id="12" name="C4-E14 line 10" descr="sci-ppt:o010"/>
-          <p:cNvCxnSpPr/>
+        <p:txBody>
+          <a:bodyPr wrap="none" lIns="18288" rIns="18288" tIns="18288" bIns="18288" anchor="t">
+            <a:spAutoFit/>
+          </a:bodyPr>
+          <a:lstStyle/>
+          <a:p>
+            <a:pPr algn="l">
+              <a:spcAft>
+                <a:spcPts val="0"/>
+              </a:spcAft>
+            </a:pPr>
+            <a:r>
+              <a:rPr sz="1300" b="1" i="0">
+                <a:solidFill>
+                  <a:srgbClr val="E7F0F3"/>
+                </a:solidFill>
+                <a:latin typeface="Arial"/>
+              </a:rPr>
+              <a:t>g′ = p₀ r / (2D_f)</a:t>
+            </a:r>
+          </a:p>
+        </p:txBody>
+      </p:sp>
+      <p:sp>
+        <p:nvSpPr>
+          <p:cNvPr id="12" name="C4-E14 text 10" descr="sci-ppt:o010"/>
+          <p:cNvSpPr txBox="1"/>
           <p:nvPr/>
-        </p:nvCxnSpPr>
-        <p:spPr>
-          <a:xfrm flipV="1">
-            <a:off x="1618488" y="2632419"/>
-            <a:ext cx="76581" cy="46480"/>
-          </a:xfrm>
-          <a:prstGeom prst="line">
+        </p:nvSpPr>
+        <p:spPr>
+          <a:xfrm>
+            <a:off x="548640" y="4050791"/>
+            <a:ext cx="2834640" cy="231648"/>
+          </a:xfrm>
+          <a:prstGeom prst="rect">
             <a:avLst/>
           </a:prstGeom>
-          <a:ln w="25400">
-            <a:solidFill>
-              <a:srgbClr val="8EDBD4"/>
-            </a:solidFill>
-          </a:ln>
+          <a:noFill/>
           <a:effectLst/>
         </p:spPr>
-      </p:cxnSp>
-      <p:cxnSp>
-        <p:nvCxnSpPr>
-          <p:cNvPr id="13" name="C4-E14 line 11" descr="sci-ppt:o011"/>
-          <p:cNvCxnSpPr/>
+        <p:txBody>
+          <a:bodyPr wrap="none" lIns="18288" rIns="18288" tIns="18288" bIns="18288" anchor="t">
+            <a:spAutoFit/>
+          </a:bodyPr>
+          <a:lstStyle/>
+          <a:p>
+            <a:pPr algn="l">
+              <a:spcAft>
+                <a:spcPts val="0"/>
+              </a:spcAft>
+            </a:pPr>
+            <a:r>
+              <a:rPr sz="1200" b="1" i="0">
+                <a:solidFill>
+                  <a:srgbClr val="8EDBD4"/>
+                </a:solidFill>
+                <a:latin typeface="Arial"/>
+              </a:rPr>
+              <a:t>integrate</a:t>
+            </a:r>
+          </a:p>
+        </p:txBody>
+      </p:sp>
+      <p:sp>
+        <p:nvSpPr>
+          <p:cNvPr id="13" name="C4-E14 text 11" descr="sci-ppt:o011"/>
+          <p:cNvSpPr txBox="1"/>
           <p:nvPr/>
-        </p:nvCxnSpPr>
-        <p:spPr>
-          <a:xfrm flipV="1">
-            <a:off x="1695069" y="2582822"/>
-            <a:ext cx="76581" cy="49597"/>
-          </a:xfrm>
-          <a:prstGeom prst="line">
+        </p:nvSpPr>
+        <p:spPr>
+          <a:xfrm>
+            <a:off x="3474720" y="4050791"/>
+            <a:ext cx="4572000" cy="247142"/>
+          </a:xfrm>
+          <a:prstGeom prst="rect">
             <a:avLst/>
           </a:prstGeom>
-          <a:ln w="25400">
-            <a:solidFill>
-              <a:srgbClr val="8EDBD4"/>
-            </a:solidFill>
-          </a:ln>
+          <a:noFill/>
           <a:effectLst/>
         </p:spPr>
-      </p:cxnSp>
+        <p:txBody>
+          <a:bodyPr wrap="none" lIns="18288" rIns="18288" tIns="18288" bIns="18288" anchor="t">
+            <a:spAutoFit/>
+          </a:bodyPr>
+          <a:lstStyle/>
+          <a:p>
+            <a:pPr algn="l">
+              <a:spcAft>
+                <a:spcPts val="0"/>
+              </a:spcAft>
+            </a:pPr>
+            <a:r>
+              <a:rPr sz="1300" b="1" i="0">
+                <a:solidFill>
+                  <a:srgbClr val="E7F0F3"/>
+                </a:solidFill>
+                <a:latin typeface="Arial"/>
+              </a:rPr>
+              <a:t>g(r) = p₀ r² / (4D_f) + C₂</a:t>
+            </a:r>
+          </a:p>
+        </p:txBody>
+      </p:sp>
       <p:cxnSp>
         <p:nvCxnSpPr>
           <p:cNvPr id="14" name="C4-E14 line 12" descr="sci-ppt:o012"/>
@@ -3385,16 +3583,16 @@
           <p:nvPr/>
         </p:nvCxnSpPr>
         <p:spPr>
-          <a:xfrm flipV="1">
-            <a:off x="1771650" y="2530552"/>
-            <a:ext cx="76581" cy="52270"/>
+          <a:xfrm>
+            <a:off x="8503920" y="4572000"/>
+            <a:ext cx="3200400" cy="0"/>
           </a:xfrm>
           <a:prstGeom prst="line">
             <a:avLst/>
           </a:prstGeom>
-          <a:ln w="25400">
+          <a:ln w="19050">
             <a:solidFill>
-              <a:srgbClr val="8EDBD4"/>
+              <a:srgbClr val="B4C7D2"/>
             </a:solidFill>
           </a:ln>
           <a:effectLst/>
@@ -3407,16 +3605,16 @@
           <p:nvPr/>
         </p:nvCxnSpPr>
         <p:spPr>
-          <a:xfrm flipV="1">
-            <a:off x="1848231" y="2476039"/>
-            <a:ext cx="76581" cy="54513"/>
+          <a:xfrm>
+            <a:off x="8503920" y="1463040"/>
+            <a:ext cx="0" cy="3108960"/>
           </a:xfrm>
           <a:prstGeom prst="line">
             <a:avLst/>
           </a:prstGeom>
-          <a:ln w="25400">
+          <a:ln w="19050">
             <a:solidFill>
-              <a:srgbClr val="8EDBD4"/>
+              <a:srgbClr val="B4C7D2"/>
             </a:solidFill>
           </a:ln>
           <a:effectLst/>
@@ -3429,16 +3627,16 @@
           <p:nvPr/>
         </p:nvCxnSpPr>
         <p:spPr>
-          <a:xfrm flipV="1">
-            <a:off x="1924812" y="2419698"/>
-            <a:ext cx="76581" cy="56341"/>
+          <a:xfrm>
+            <a:off x="8503920" y="4572000"/>
+            <a:ext cx="0" cy="64008"/>
           </a:xfrm>
           <a:prstGeom prst="line">
             <a:avLst/>
           </a:prstGeom>
-          <a:ln w="25400">
+          <a:ln w="12700">
             <a:solidFill>
-              <a:srgbClr val="8EDBD4"/>
+              <a:srgbClr val="B4C7D2"/>
             </a:solidFill>
           </a:ln>
           <a:effectLst/>
@@ -3451,43 +3649,61 @@
           <p:nvPr/>
         </p:nvCxnSpPr>
         <p:spPr>
-          <a:xfrm flipV="1">
-            <a:off x="2001393" y="2361931"/>
-            <a:ext cx="76581" cy="57767"/>
+          <a:xfrm>
+            <a:off x="8503920" y="1463040"/>
+            <a:ext cx="0" cy="3108960"/>
           </a:xfrm>
           <a:prstGeom prst="line">
             <a:avLst/>
           </a:prstGeom>
-          <a:ln w="25400">
+          <a:ln w="7620">
             <a:solidFill>
-              <a:srgbClr val="8EDBD4"/>
+              <a:srgbClr val="2E4756"/>
             </a:solidFill>
           </a:ln>
           <a:effectLst/>
         </p:spPr>
       </p:cxnSp>
-      <p:cxnSp>
-        <p:nvCxnSpPr>
-          <p:cNvPr id="18" name="C4-E14 line 16" descr="sci-ppt:o016"/>
-          <p:cNvCxnSpPr/>
+      <p:sp>
+        <p:nvSpPr>
+          <p:cNvPr id="18" name="C4-E14 text 16" descr="sci-ppt:o016"/>
+          <p:cNvSpPr txBox="1"/>
           <p:nvPr/>
-        </p:nvCxnSpPr>
-        <p:spPr>
-          <a:xfrm flipV="1">
-            <a:off x="2077974" y="2303122"/>
-            <a:ext cx="76581" cy="58809"/>
-          </a:xfrm>
-          <a:prstGeom prst="line">
+        </p:nvSpPr>
+        <p:spPr>
+          <a:xfrm>
+            <a:off x="8046720" y="4654296"/>
+            <a:ext cx="914400" cy="208407"/>
+          </a:xfrm>
+          <a:prstGeom prst="rect">
             <a:avLst/>
           </a:prstGeom>
-          <a:ln w="25400">
-            <a:solidFill>
-              <a:srgbClr val="8EDBD4"/>
-            </a:solidFill>
-          </a:ln>
+          <a:noFill/>
           <a:effectLst/>
         </p:spPr>
-      </p:cxnSp>
+        <p:txBody>
+          <a:bodyPr wrap="none" lIns="18288" rIns="18288" tIns="18288" bIns="18288" anchor="t">
+            <a:spAutoFit/>
+          </a:bodyPr>
+          <a:lstStyle/>
+          <a:p>
+            <a:pPr algn="ctr">
+              <a:spcAft>
+                <a:spcPts val="0"/>
+              </a:spcAft>
+            </a:pPr>
+            <a:r>
+              <a:rPr sz="1050" b="0" i="0">
+                <a:solidFill>
+                  <a:srgbClr val="B4C7D2"/>
+                </a:solidFill>
+                <a:latin typeface="Arial"/>
+              </a:rPr>
+              <a:t>0</a:t>
+            </a:r>
+          </a:p>
+        </p:txBody>
+      </p:sp>
       <p:cxnSp>
         <p:nvCxnSpPr>
           <p:cNvPr id="19" name="C4-E14 line 17" descr="sci-ppt:o017"/>
@@ -3495,16 +3711,16 @@
           <p:nvPr/>
         </p:nvCxnSpPr>
         <p:spPr>
-          <a:xfrm flipV="1">
-            <a:off x="2154555" y="2243644"/>
-            <a:ext cx="76581" cy="59478"/>
+          <a:xfrm>
+            <a:off x="10104120" y="4572000"/>
+            <a:ext cx="0" cy="64008"/>
           </a:xfrm>
           <a:prstGeom prst="line">
             <a:avLst/>
           </a:prstGeom>
-          <a:ln w="25400">
+          <a:ln w="12700">
             <a:solidFill>
-              <a:srgbClr val="8EDBD4"/>
+              <a:srgbClr val="B4C7D2"/>
             </a:solidFill>
           </a:ln>
           <a:effectLst/>
@@ -3517,43 +3733,61 @@
           <p:nvPr/>
         </p:nvCxnSpPr>
         <p:spPr>
-          <a:xfrm flipV="1">
-            <a:off x="2231136" y="2183855"/>
-            <a:ext cx="76581" cy="59789"/>
+          <a:xfrm>
+            <a:off x="10104120" y="1463040"/>
+            <a:ext cx="0" cy="3108960"/>
           </a:xfrm>
           <a:prstGeom prst="line">
             <a:avLst/>
           </a:prstGeom>
-          <a:ln w="25400">
+          <a:ln w="7620">
             <a:solidFill>
-              <a:srgbClr val="8EDBD4"/>
+              <a:srgbClr val="2E4756"/>
             </a:solidFill>
           </a:ln>
           <a:effectLst/>
         </p:spPr>
       </p:cxnSp>
-      <p:cxnSp>
-        <p:nvCxnSpPr>
-          <p:cNvPr id="21" name="C4-E14 line 19" descr="sci-ppt:o019"/>
-          <p:cNvCxnSpPr/>
+      <p:sp>
+        <p:nvSpPr>
+          <p:cNvPr id="21" name="C4-E14 text 19" descr="sci-ppt:o019"/>
+          <p:cNvSpPr txBox="1"/>
           <p:nvPr/>
-        </p:nvCxnSpPr>
-        <p:spPr>
-          <a:xfrm flipV="1">
-            <a:off x="2307717" y="2124095"/>
-            <a:ext cx="76581" cy="59760"/>
-          </a:xfrm>
-          <a:prstGeom prst="line">
+        </p:nvSpPr>
+        <p:spPr>
+          <a:xfrm>
+            <a:off x="9646920" y="4654296"/>
+            <a:ext cx="914400" cy="208407"/>
+          </a:xfrm>
+          <a:prstGeom prst="rect">
             <a:avLst/>
           </a:prstGeom>
-          <a:ln w="25400">
-            <a:solidFill>
-              <a:srgbClr val="8EDBD4"/>
-            </a:solidFill>
-          </a:ln>
+          <a:noFill/>
           <a:effectLst/>
         </p:spPr>
-      </p:cxnSp>
+        <p:txBody>
+          <a:bodyPr wrap="none" lIns="18288" rIns="18288" tIns="18288" bIns="18288" anchor="t">
+            <a:spAutoFit/>
+          </a:bodyPr>
+          <a:lstStyle/>
+          <a:p>
+            <a:pPr algn="ctr">
+              <a:spcAft>
+                <a:spcPts val="0"/>
+              </a:spcAft>
+            </a:pPr>
+            <a:r>
+              <a:rPr sz="1050" b="0" i="0">
+                <a:solidFill>
+                  <a:srgbClr val="B4C7D2"/>
+                </a:solidFill>
+                <a:latin typeface="Arial"/>
+              </a:rPr>
+              <a:t>0.5</a:t>
+            </a:r>
+          </a:p>
+        </p:txBody>
+      </p:sp>
       <p:cxnSp>
         <p:nvCxnSpPr>
           <p:cNvPr id="22" name="C4-E14 line 20" descr="sci-ppt:o020"/>
@@ -3561,16 +3795,16 @@
           <p:nvPr/>
         </p:nvCxnSpPr>
         <p:spPr>
-          <a:xfrm flipV="1">
-            <a:off x="2384298" y="2064694"/>
-            <a:ext cx="76581" cy="59401"/>
+          <a:xfrm>
+            <a:off x="11704320" y="4572000"/>
+            <a:ext cx="0" cy="64008"/>
           </a:xfrm>
           <a:prstGeom prst="line">
             <a:avLst/>
           </a:prstGeom>
-          <a:ln w="25400">
+          <a:ln w="12700">
             <a:solidFill>
-              <a:srgbClr val="8EDBD4"/>
+              <a:srgbClr val="B4C7D2"/>
             </a:solidFill>
           </a:ln>
           <a:effectLst/>
@@ -3583,43 +3817,61 @@
           <p:nvPr/>
         </p:nvCxnSpPr>
         <p:spPr>
-          <a:xfrm flipV="1">
-            <a:off x="2460879" y="2005965"/>
-            <a:ext cx="76581" cy="58729"/>
+          <a:xfrm>
+            <a:off x="11704320" y="1463040"/>
+            <a:ext cx="0" cy="3108960"/>
           </a:xfrm>
           <a:prstGeom prst="line">
             <a:avLst/>
           </a:prstGeom>
-          <a:ln w="25400">
+          <a:ln w="7620">
             <a:solidFill>
-              <a:srgbClr val="8EDBD4"/>
+              <a:srgbClr val="2E4756"/>
             </a:solidFill>
           </a:ln>
           <a:effectLst/>
         </p:spPr>
       </p:cxnSp>
-      <p:cxnSp>
-        <p:nvCxnSpPr>
-          <p:cNvPr id="24" name="C4-E14 line 22" descr="sci-ppt:o022"/>
-          <p:cNvCxnSpPr/>
+      <p:sp>
+        <p:nvSpPr>
+          <p:cNvPr id="24" name="C4-E14 text 22" descr="sci-ppt:o022"/>
+          <p:cNvSpPr txBox="1"/>
           <p:nvPr/>
-        </p:nvCxnSpPr>
-        <p:spPr>
-          <a:xfrm flipV="1">
-            <a:off x="2537460" y="1948205"/>
-            <a:ext cx="76581" cy="57760"/>
-          </a:xfrm>
-          <a:prstGeom prst="line">
+        </p:nvSpPr>
+        <p:spPr>
+          <a:xfrm>
+            <a:off x="11247120" y="4654296"/>
+            <a:ext cx="914400" cy="208407"/>
+          </a:xfrm>
+          <a:prstGeom prst="rect">
             <a:avLst/>
           </a:prstGeom>
-          <a:ln w="25400">
-            <a:solidFill>
-              <a:srgbClr val="8EDBD4"/>
-            </a:solidFill>
-          </a:ln>
+          <a:noFill/>
           <a:effectLst/>
         </p:spPr>
-      </p:cxnSp>
+        <p:txBody>
+          <a:bodyPr wrap="none" lIns="18288" rIns="18288" tIns="18288" bIns="18288" anchor="t">
+            <a:spAutoFit/>
+          </a:bodyPr>
+          <a:lstStyle/>
+          <a:p>
+            <a:pPr algn="ctr">
+              <a:spcAft>
+                <a:spcPts val="0"/>
+              </a:spcAft>
+            </a:pPr>
+            <a:r>
+              <a:rPr sz="1050" b="0" i="0">
+                <a:solidFill>
+                  <a:srgbClr val="B4C7D2"/>
+                </a:solidFill>
+                <a:latin typeface="Arial"/>
+              </a:rPr>
+              <a:t>1</a:t>
+            </a:r>
+          </a:p>
+        </p:txBody>
+      </p:sp>
       <p:cxnSp>
         <p:nvCxnSpPr>
           <p:cNvPr id="25" name="C4-E14 line 23" descr="sci-ppt:o023"/>
@@ -3627,16 +3879,16 @@
           <p:nvPr/>
         </p:nvCxnSpPr>
         <p:spPr>
-          <a:xfrm flipV="1">
-            <a:off x="2614041" y="1891701"/>
-            <a:ext cx="76581" cy="56504"/>
+          <a:xfrm>
+            <a:off x="8439912" y="4572000"/>
+            <a:ext cx="64008" cy="0"/>
           </a:xfrm>
           <a:prstGeom prst="line">
             <a:avLst/>
           </a:prstGeom>
-          <a:ln w="25400">
+          <a:ln w="12700">
             <a:solidFill>
-              <a:srgbClr val="8EDBD4"/>
+              <a:srgbClr val="B4C7D2"/>
             </a:solidFill>
           </a:ln>
           <a:effectLst/>
@@ -3649,16 +3901,16 @@
           <p:nvPr/>
         </p:nvCxnSpPr>
         <p:spPr>
-          <a:xfrm flipV="1">
-            <a:off x="2690622" y="1836720"/>
-            <a:ext cx="76581" cy="54981"/>
+          <a:xfrm>
+            <a:off x="8439912" y="3017520"/>
+            <a:ext cx="64008" cy="0"/>
           </a:xfrm>
           <a:prstGeom prst="line">
             <a:avLst/>
           </a:prstGeom>
-          <a:ln w="25400">
+          <a:ln w="12700">
             <a:solidFill>
-              <a:srgbClr val="8EDBD4"/>
+              <a:srgbClr val="B4C7D2"/>
             </a:solidFill>
           </a:ln>
           <a:effectLst/>
@@ -3671,43 +3923,61 @@
           <p:nvPr/>
         </p:nvCxnSpPr>
         <p:spPr>
-          <a:xfrm flipV="1">
-            <a:off x="2767203" y="1783518"/>
-            <a:ext cx="76581" cy="53202"/>
+          <a:xfrm>
+            <a:off x="8503920" y="3017520"/>
+            <a:ext cx="3200400" cy="0"/>
           </a:xfrm>
           <a:prstGeom prst="line">
             <a:avLst/>
           </a:prstGeom>
-          <a:ln w="25400">
+          <a:ln w="7620">
             <a:solidFill>
-              <a:srgbClr val="8EDBD4"/>
+              <a:srgbClr val="2E4756"/>
             </a:solidFill>
           </a:ln>
           <a:effectLst/>
         </p:spPr>
       </p:cxnSp>
-      <p:cxnSp>
-        <p:nvCxnSpPr>
-          <p:cNvPr id="28" name="C4-E14 line 26" descr="sci-ppt:o026"/>
-          <p:cNvCxnSpPr/>
+      <p:sp>
+        <p:nvSpPr>
+          <p:cNvPr id="28" name="C4-E14 text 26" descr="sci-ppt:o026"/>
+          <p:cNvSpPr txBox="1"/>
           <p:nvPr/>
-        </p:nvCxnSpPr>
-        <p:spPr>
-          <a:xfrm flipV="1">
-            <a:off x="2843784" y="1732337"/>
-            <a:ext cx="76581" cy="51181"/>
-          </a:xfrm>
-          <a:prstGeom prst="line">
+        </p:nvSpPr>
+        <p:spPr>
+          <a:xfrm>
+            <a:off x="7635240" y="2935224"/>
+            <a:ext cx="777240" cy="208407"/>
+          </a:xfrm>
+          <a:prstGeom prst="rect">
             <a:avLst/>
           </a:prstGeom>
-          <a:ln w="25400">
-            <a:solidFill>
-              <a:srgbClr val="8EDBD4"/>
-            </a:solidFill>
-          </a:ln>
+          <a:noFill/>
           <a:effectLst/>
         </p:spPr>
-      </p:cxnSp>
+        <p:txBody>
+          <a:bodyPr wrap="none" lIns="18288" rIns="18288" tIns="18288" bIns="18288" anchor="t">
+            <a:spAutoFit/>
+          </a:bodyPr>
+          <a:lstStyle/>
+          <a:p>
+            <a:pPr algn="r">
+              <a:spcAft>
+                <a:spcPts val="0"/>
+              </a:spcAft>
+            </a:pPr>
+            <a:r>
+              <a:rPr sz="1050" b="0" i="0">
+                <a:solidFill>
+                  <a:srgbClr val="B4C7D2"/>
+                </a:solidFill>
+                <a:latin typeface="Arial"/>
+              </a:rPr>
+              <a:t>0</a:t>
+            </a:r>
+          </a:p>
+        </p:txBody>
+      </p:sp>
       <p:cxnSp>
         <p:nvCxnSpPr>
           <p:cNvPr id="29" name="C4-E14 line 27" descr="sci-ppt:o027"/>
@@ -3715,16 +3985,16 @@
           <p:nvPr/>
         </p:nvCxnSpPr>
         <p:spPr>
-          <a:xfrm flipV="1">
-            <a:off x="2920365" y="1683400"/>
-            <a:ext cx="76581" cy="48937"/>
+          <a:xfrm>
+            <a:off x="8439912" y="1463040"/>
+            <a:ext cx="64008" cy="0"/>
           </a:xfrm>
           <a:prstGeom prst="line">
             <a:avLst/>
           </a:prstGeom>
-          <a:ln w="25400">
+          <a:ln w="12700">
             <a:solidFill>
-              <a:srgbClr val="8EDBD4"/>
+              <a:srgbClr val="B4C7D2"/>
             </a:solidFill>
           </a:ln>
           <a:effectLst/>
@@ -3737,153 +4007,838 @@
           <p:nvPr/>
         </p:nvCxnSpPr>
         <p:spPr>
-          <a:xfrm flipV="1">
-            <a:off x="2996946" y="1636921"/>
-            <a:ext cx="76581" cy="46479"/>
+          <a:xfrm>
+            <a:off x="8503920" y="1463040"/>
+            <a:ext cx="3200400" cy="0"/>
           </a:xfrm>
           <a:prstGeom prst="line">
             <a:avLst/>
           </a:prstGeom>
-          <a:ln w="25400">
+          <a:ln w="7620">
             <a:solidFill>
-              <a:srgbClr val="8EDBD4"/>
+              <a:srgbClr val="2E4756"/>
             </a:solidFill>
           </a:ln>
           <a:effectLst/>
         </p:spPr>
       </p:cxnSp>
-      <p:cxnSp>
-        <p:nvCxnSpPr>
-          <p:cNvPr id="31" name="C4-E14 line 29" descr="sci-ppt:o029"/>
-          <p:cNvCxnSpPr/>
+      <p:sp>
+        <p:nvSpPr>
+          <p:cNvPr id="31" name="C4-E14 text 29" descr="sci-ppt:o029"/>
+          <p:cNvSpPr txBox="1"/>
           <p:nvPr/>
-        </p:nvCxnSpPr>
-        <p:spPr>
-          <a:xfrm flipV="1">
-            <a:off x="3073527" y="1593095"/>
-            <a:ext cx="76581" cy="43826"/>
-          </a:xfrm>
-          <a:prstGeom prst="line">
+        </p:nvSpPr>
+        <p:spPr>
+          <a:xfrm>
+            <a:off x="7635240" y="1380744"/>
+            <a:ext cx="777240" cy="208407"/>
+          </a:xfrm>
+          <a:prstGeom prst="rect">
             <a:avLst/>
           </a:prstGeom>
-          <a:ln w="25400">
+          <a:noFill/>
+          <a:effectLst/>
+        </p:spPr>
+        <p:txBody>
+          <a:bodyPr wrap="none" lIns="18288" rIns="18288" tIns="18288" bIns="18288" anchor="t">
+            <a:spAutoFit/>
+          </a:bodyPr>
+          <a:lstStyle/>
+          <a:p>
+            <a:pPr algn="r">
+              <a:spcAft>
+                <a:spcPts val="0"/>
+              </a:spcAft>
+            </a:pPr>
+            <a:r>
+              <a:rPr sz="1050" b="0" i="0">
+                <a:solidFill>
+                  <a:srgbClr val="B4C7D2"/>
+                </a:solidFill>
+                <a:latin typeface="Arial"/>
+              </a:rPr>
+              <a:t>8</a:t>
+            </a:r>
+          </a:p>
+        </p:txBody>
+      </p:sp>
+      <p:sp>
+        <p:nvSpPr>
+          <p:cNvPr id="32" name="C4-E14 text 30" descr="sci-ppt:o030"/>
+          <p:cNvSpPr txBox="1"/>
+          <p:nvPr/>
+        </p:nvSpPr>
+        <p:spPr>
+          <a:xfrm>
+            <a:off x="8503920" y="4855464"/>
+            <a:ext cx="3200400" cy="231648"/>
+          </a:xfrm>
+          <a:prstGeom prst="rect">
+            <a:avLst/>
+          </a:prstGeom>
+          <a:noFill/>
+          <a:effectLst/>
+        </p:spPr>
+        <p:txBody>
+          <a:bodyPr wrap="none" lIns="18288" rIns="18288" tIns="18288" bIns="18288" anchor="t">
+            <a:spAutoFit/>
+          </a:bodyPr>
+          <a:lstStyle/>
+          <a:p>
+            <a:pPr algn="ctr">
+              <a:spcAft>
+                <a:spcPts val="0"/>
+              </a:spcAft>
+            </a:pPr>
+            <a:r>
+              <a:rPr sz="1200" b="0" i="0">
+                <a:solidFill>
+                  <a:srgbClr val="E7F0F3"/>
+                </a:solidFill>
+                <a:latin typeface="Arial"/>
+              </a:rPr>
+              <a:t>r / b</a:t>
+            </a:r>
+          </a:p>
+        </p:txBody>
+      </p:sp>
+      <p:sp>
+        <p:nvSpPr>
+          <p:cNvPr id="33" name="C4-E14 text 31" descr="sci-ppt:o031"/>
+          <p:cNvSpPr txBox="1"/>
+          <p:nvPr/>
+        </p:nvSpPr>
+        <p:spPr>
+          <a:xfrm>
+            <a:off x="7955280" y="1115568"/>
+            <a:ext cx="3200400" cy="231648"/>
+          </a:xfrm>
+          <a:prstGeom prst="rect">
+            <a:avLst/>
+          </a:prstGeom>
+          <a:noFill/>
+          <a:effectLst/>
+        </p:spPr>
+        <p:txBody>
+          <a:bodyPr wrap="none" lIns="18288" rIns="18288" tIns="18288" bIns="18288" anchor="t">
+            <a:spAutoFit/>
+          </a:bodyPr>
+          <a:lstStyle/>
+          <a:p>
+            <a:pPr algn="l">
+              <a:spcAft>
+                <a:spcPts val="0"/>
+              </a:spcAft>
+            </a:pPr>
+            <a:r>
+              <a:rPr sz="1200" b="0" i="0">
+                <a:solidFill>
+                  <a:srgbClr val="E7F0F3"/>
+                </a:solidFill>
+                <a:latin typeface="Arial"/>
+              </a:rPr>
+              <a:t>C₁ / r  term</a:t>
+            </a:r>
+          </a:p>
+        </p:txBody>
+      </p:sp>
+      <p:sp>
+        <p:nvSpPr>
+          <p:cNvPr id="34" name="C4-E14 polygon 32" descr="sci-ppt:o032"/>
+          <p:cNvSpPr/>
+          <p:nvPr/>
+        </p:nvSpPr>
+        <p:spPr>
+          <a:xfrm>
+            <a:off x="8709131" y="1502328"/>
+            <a:ext cx="2995189" cy="1418037"/>
+          </a:xfrm>
+          <a:custGeom>
+            <a:avLst/>
+            <a:gdLst/>
+            <a:ahLst/>
+            <a:cxnLst/>
+            <a:rect l="l" t="t" r="r" b="b"/>
+            <a:pathLst>
+              <a:path w="2995189" h="1418037">
+                <a:moveTo>
+                  <a:pt x="0" y="0"/>
+                </a:moveTo>
+                <a:lnTo>
+                  <a:pt x="15600" y="107045"/>
+                </a:lnTo>
+                <a:lnTo>
+                  <a:pt x="31200" y="199964"/>
+                </a:lnTo>
+                <a:lnTo>
+                  <a:pt x="46800" y="281379"/>
+                </a:lnTo>
+                <a:lnTo>
+                  <a:pt x="62400" y="353302"/>
+                </a:lnTo>
+                <a:lnTo>
+                  <a:pt x="78000" y="417301"/>
+                </a:lnTo>
+                <a:lnTo>
+                  <a:pt x="93600" y="474619"/>
+                </a:lnTo>
+                <a:lnTo>
+                  <a:pt x="109200" y="526248"/>
+                </a:lnTo>
+                <a:lnTo>
+                  <a:pt x="124800" y="572996"/>
+                </a:lnTo>
+                <a:lnTo>
+                  <a:pt x="140400" y="615524"/>
+                </a:lnTo>
+                <a:lnTo>
+                  <a:pt x="155999" y="654379"/>
+                </a:lnTo>
+                <a:lnTo>
+                  <a:pt x="171599" y="690017"/>
+                </a:lnTo>
+                <a:lnTo>
+                  <a:pt x="187199" y="722821"/>
+                </a:lnTo>
+                <a:lnTo>
+                  <a:pt x="202799" y="753116"/>
+                </a:lnTo>
+                <a:lnTo>
+                  <a:pt x="218399" y="781181"/>
+                </a:lnTo>
+                <a:lnTo>
+                  <a:pt x="233999" y="807251"/>
+                </a:lnTo>
+                <a:lnTo>
+                  <a:pt x="249599" y="831534"/>
+                </a:lnTo>
+                <a:lnTo>
+                  <a:pt x="265199" y="854205"/>
+                </a:lnTo>
+                <a:lnTo>
+                  <a:pt x="280799" y="875422"/>
+                </a:lnTo>
+                <a:lnTo>
+                  <a:pt x="296399" y="895318"/>
+                </a:lnTo>
+                <a:lnTo>
+                  <a:pt x="311999" y="914015"/>
+                </a:lnTo>
+                <a:lnTo>
+                  <a:pt x="327599" y="931616"/>
+                </a:lnTo>
+                <a:lnTo>
+                  <a:pt x="343199" y="948217"/>
+                </a:lnTo>
+                <a:lnTo>
+                  <a:pt x="358799" y="963899"/>
+                </a:lnTo>
+                <a:lnTo>
+                  <a:pt x="374399" y="978736"/>
+                </a:lnTo>
+                <a:lnTo>
+                  <a:pt x="389999" y="992796"/>
+                </a:lnTo>
+                <a:lnTo>
+                  <a:pt x="405599" y="1006138"/>
+                </a:lnTo>
+                <a:lnTo>
+                  <a:pt x="421198" y="1018816"/>
+                </a:lnTo>
+                <a:lnTo>
+                  <a:pt x="436798" y="1030877"/>
+                </a:lnTo>
+                <a:lnTo>
+                  <a:pt x="452398" y="1042366"/>
+                </a:lnTo>
+                <a:lnTo>
+                  <a:pt x="467998" y="1053322"/>
+                </a:lnTo>
+                <a:lnTo>
+                  <a:pt x="483598" y="1063783"/>
+                </a:lnTo>
+                <a:lnTo>
+                  <a:pt x="499198" y="1073780"/>
+                </a:lnTo>
+                <a:lnTo>
+                  <a:pt x="514798" y="1083343"/>
+                </a:lnTo>
+                <a:lnTo>
+                  <a:pt x="530398" y="1092501"/>
+                </a:lnTo>
+                <a:lnTo>
+                  <a:pt x="545998" y="1101279"/>
+                </a:lnTo>
+                <a:lnTo>
+                  <a:pt x="561598" y="1109700"/>
+                </a:lnTo>
+                <a:lnTo>
+                  <a:pt x="577198" y="1117785"/>
+                </a:lnTo>
+                <a:lnTo>
+                  <a:pt x="592798" y="1125553"/>
+                </a:lnTo>
+                <a:lnTo>
+                  <a:pt x="608398" y="1133024"/>
+                </a:lnTo>
+                <a:lnTo>
+                  <a:pt x="623998" y="1140214"/>
+                </a:lnTo>
+                <a:lnTo>
+                  <a:pt x="639598" y="1147138"/>
+                </a:lnTo>
+                <a:lnTo>
+                  <a:pt x="655198" y="1153811"/>
+                </a:lnTo>
+                <a:lnTo>
+                  <a:pt x="670797" y="1160247"/>
+                </a:lnTo>
+                <a:lnTo>
+                  <a:pt x="686397" y="1166457"/>
+                </a:lnTo>
+                <a:lnTo>
+                  <a:pt x="701997" y="1172454"/>
+                </a:lnTo>
+                <a:lnTo>
+                  <a:pt x="717597" y="1178248"/>
+                </a:lnTo>
+                <a:lnTo>
+                  <a:pt x="733197" y="1183849"/>
+                </a:lnTo>
+                <a:lnTo>
+                  <a:pt x="748797" y="1189267"/>
+                </a:lnTo>
+                <a:lnTo>
+                  <a:pt x="764397" y="1194511"/>
+                </a:lnTo>
+                <a:lnTo>
+                  <a:pt x="779997" y="1199588"/>
+                </a:lnTo>
+                <a:lnTo>
+                  <a:pt x="795597" y="1204508"/>
+                </a:lnTo>
+                <a:lnTo>
+                  <a:pt x="811197" y="1209276"/>
+                </a:lnTo>
+                <a:lnTo>
+                  <a:pt x="826797" y="1213900"/>
+                </a:lnTo>
+                <a:lnTo>
+                  <a:pt x="842397" y="1218387"/>
+                </a:lnTo>
+                <a:lnTo>
+                  <a:pt x="857997" y="1222742"/>
+                </a:lnTo>
+                <a:lnTo>
+                  <a:pt x="873597" y="1226971"/>
+                </a:lnTo>
+                <a:lnTo>
+                  <a:pt x="889197" y="1231079"/>
+                </a:lnTo>
+                <a:lnTo>
+                  <a:pt x="904797" y="1235072"/>
+                </a:lnTo>
+                <a:lnTo>
+                  <a:pt x="920397" y="1238954"/>
+                </a:lnTo>
+                <a:lnTo>
+                  <a:pt x="935996" y="1242730"/>
+                </a:lnTo>
+                <a:lnTo>
+                  <a:pt x="951596" y="1246405"/>
+                </a:lnTo>
+                <a:lnTo>
+                  <a:pt x="967196" y="1249981"/>
+                </a:lnTo>
+                <a:lnTo>
+                  <a:pt x="982796" y="1253464"/>
+                </a:lnTo>
+                <a:lnTo>
+                  <a:pt x="998396" y="1256856"/>
+                </a:lnTo>
+                <a:lnTo>
+                  <a:pt x="1013996" y="1260161"/>
+                </a:lnTo>
+                <a:lnTo>
+                  <a:pt x="1029596" y="1263383"/>
+                </a:lnTo>
+                <a:lnTo>
+                  <a:pt x="1045196" y="1266525"/>
+                </a:lnTo>
+                <a:lnTo>
+                  <a:pt x="1060796" y="1269589"/>
+                </a:lnTo>
+                <a:lnTo>
+                  <a:pt x="1076396" y="1272578"/>
+                </a:lnTo>
+                <a:lnTo>
+                  <a:pt x="1091996" y="1275496"/>
+                </a:lnTo>
+                <a:lnTo>
+                  <a:pt x="1107596" y="1278344"/>
+                </a:lnTo>
+                <a:lnTo>
+                  <a:pt x="1123196" y="1281126"/>
+                </a:lnTo>
+                <a:lnTo>
+                  <a:pt x="1138796" y="1283842"/>
+                </a:lnTo>
+                <a:lnTo>
+                  <a:pt x="1154396" y="1286497"/>
+                </a:lnTo>
+                <a:lnTo>
+                  <a:pt x="1169996" y="1289091"/>
+                </a:lnTo>
+                <a:lnTo>
+                  <a:pt x="1185595" y="1291627"/>
+                </a:lnTo>
+                <a:lnTo>
+                  <a:pt x="1201195" y="1294107"/>
+                </a:lnTo>
+                <a:lnTo>
+                  <a:pt x="1216795" y="1296532"/>
+                </a:lnTo>
+                <a:lnTo>
+                  <a:pt x="1232395" y="1298905"/>
+                </a:lnTo>
+                <a:lnTo>
+                  <a:pt x="1247995" y="1301227"/>
+                </a:lnTo>
+                <a:lnTo>
+                  <a:pt x="1263595" y="1303499"/>
+                </a:lnTo>
+                <a:lnTo>
+                  <a:pt x="1279195" y="1305724"/>
+                </a:lnTo>
+                <a:lnTo>
+                  <a:pt x="1294795" y="1307903"/>
+                </a:lnTo>
+                <a:lnTo>
+                  <a:pt x="1310395" y="1310036"/>
+                </a:lnTo>
+                <a:lnTo>
+                  <a:pt x="1325995" y="1312126"/>
+                </a:lnTo>
+                <a:lnTo>
+                  <a:pt x="1341595" y="1314174"/>
+                </a:lnTo>
+                <a:lnTo>
+                  <a:pt x="1357195" y="1316181"/>
+                </a:lnTo>
+                <a:lnTo>
+                  <a:pt x="1372795" y="1318149"/>
+                </a:lnTo>
+                <a:lnTo>
+                  <a:pt x="1388395" y="1320078"/>
+                </a:lnTo>
+                <a:lnTo>
+                  <a:pt x="1403995" y="1321969"/>
+                </a:lnTo>
+                <a:lnTo>
+                  <a:pt x="1419595" y="1323824"/>
+                </a:lnTo>
+                <a:lnTo>
+                  <a:pt x="1435195" y="1325644"/>
+                </a:lnTo>
+                <a:lnTo>
+                  <a:pt x="1450794" y="1327430"/>
+                </a:lnTo>
+                <a:lnTo>
+                  <a:pt x="1466394" y="1329182"/>
+                </a:lnTo>
+                <a:lnTo>
+                  <a:pt x="1481994" y="1330902"/>
+                </a:lnTo>
+                <a:lnTo>
+                  <a:pt x="1497594" y="1332590"/>
+                </a:lnTo>
+                <a:lnTo>
+                  <a:pt x="1513194" y="1334248"/>
+                </a:lnTo>
+                <a:lnTo>
+                  <a:pt x="1528794" y="1335876"/>
+                </a:lnTo>
+                <a:lnTo>
+                  <a:pt x="1544394" y="1337474"/>
+                </a:lnTo>
+                <a:lnTo>
+                  <a:pt x="1559994" y="1339045"/>
+                </a:lnTo>
+                <a:lnTo>
+                  <a:pt x="1575594" y="1340588"/>
+                </a:lnTo>
+                <a:lnTo>
+                  <a:pt x="1591194" y="1342104"/>
+                </a:lnTo>
+                <a:lnTo>
+                  <a:pt x="1606794" y="1343594"/>
+                </a:lnTo>
+                <a:lnTo>
+                  <a:pt x="1622394" y="1345059"/>
+                </a:lnTo>
+                <a:lnTo>
+                  <a:pt x="1637994" y="1346499"/>
+                </a:lnTo>
+                <a:lnTo>
+                  <a:pt x="1653594" y="1347915"/>
+                </a:lnTo>
+                <a:lnTo>
+                  <a:pt x="1669194" y="1349307"/>
+                </a:lnTo>
+                <a:lnTo>
+                  <a:pt x="1684794" y="1350676"/>
+                </a:lnTo>
+                <a:lnTo>
+                  <a:pt x="1700394" y="1352023"/>
+                </a:lnTo>
+                <a:lnTo>
+                  <a:pt x="1715993" y="1353348"/>
+                </a:lnTo>
+                <a:lnTo>
+                  <a:pt x="1731593" y="1354651"/>
+                </a:lnTo>
+                <a:lnTo>
+                  <a:pt x="1747193" y="1355934"/>
+                </a:lnTo>
+                <a:lnTo>
+                  <a:pt x="1762793" y="1357197"/>
+                </a:lnTo>
+                <a:lnTo>
+                  <a:pt x="1778393" y="1358439"/>
+                </a:lnTo>
+                <a:lnTo>
+                  <a:pt x="1793993" y="1359662"/>
+                </a:lnTo>
+                <a:lnTo>
+                  <a:pt x="1809593" y="1360866"/>
+                </a:lnTo>
+                <a:lnTo>
+                  <a:pt x="1825193" y="1362052"/>
+                </a:lnTo>
+                <a:lnTo>
+                  <a:pt x="1840793" y="1363220"/>
+                </a:lnTo>
+                <a:lnTo>
+                  <a:pt x="1856393" y="1364370"/>
+                </a:lnTo>
+                <a:lnTo>
+                  <a:pt x="1871993" y="1365502"/>
+                </a:lnTo>
+                <a:lnTo>
+                  <a:pt x="1887593" y="1366618"/>
+                </a:lnTo>
+                <a:lnTo>
+                  <a:pt x="1903193" y="1367717"/>
+                </a:lnTo>
+                <a:lnTo>
+                  <a:pt x="1918793" y="1368801"/>
+                </a:lnTo>
+                <a:lnTo>
+                  <a:pt x="1934393" y="1369868"/>
+                </a:lnTo>
+                <a:lnTo>
+                  <a:pt x="1949993" y="1370920"/>
+                </a:lnTo>
+                <a:lnTo>
+                  <a:pt x="1965592" y="1371957"/>
+                </a:lnTo>
+                <a:lnTo>
+                  <a:pt x="1981192" y="1372979"/>
+                </a:lnTo>
+                <a:lnTo>
+                  <a:pt x="1996792" y="1373986"/>
+                </a:lnTo>
+                <a:lnTo>
+                  <a:pt x="2012392" y="1374979"/>
+                </a:lnTo>
+                <a:lnTo>
+                  <a:pt x="2027992" y="1375959"/>
+                </a:lnTo>
+                <a:lnTo>
+                  <a:pt x="2043592" y="1376925"/>
+                </a:lnTo>
+                <a:lnTo>
+                  <a:pt x="2059192" y="1377877"/>
+                </a:lnTo>
+                <a:lnTo>
+                  <a:pt x="2074792" y="1378817"/>
+                </a:lnTo>
+                <a:lnTo>
+                  <a:pt x="2090392" y="1379744"/>
+                </a:lnTo>
+                <a:lnTo>
+                  <a:pt x="2105992" y="1380658"/>
+                </a:lnTo>
+                <a:lnTo>
+                  <a:pt x="2121592" y="1381560"/>
+                </a:lnTo>
+                <a:lnTo>
+                  <a:pt x="2137192" y="1382450"/>
+                </a:lnTo>
+                <a:lnTo>
+                  <a:pt x="2152792" y="1383328"/>
+                </a:lnTo>
+                <a:lnTo>
+                  <a:pt x="2168392" y="1384195"/>
+                </a:lnTo>
+                <a:lnTo>
+                  <a:pt x="2183992" y="1385050"/>
+                </a:lnTo>
+                <a:lnTo>
+                  <a:pt x="2199592" y="1385894"/>
+                </a:lnTo>
+                <a:lnTo>
+                  <a:pt x="2215192" y="1386727"/>
+                </a:lnTo>
+                <a:lnTo>
+                  <a:pt x="2230791" y="1387550"/>
+                </a:lnTo>
+                <a:lnTo>
+                  <a:pt x="2246391" y="1388362"/>
+                </a:lnTo>
+                <a:lnTo>
+                  <a:pt x="2261991" y="1389164"/>
+                </a:lnTo>
+                <a:lnTo>
+                  <a:pt x="2277591" y="1389956"/>
+                </a:lnTo>
+                <a:lnTo>
+                  <a:pt x="2293191" y="1390738"/>
+                </a:lnTo>
+                <a:lnTo>
+                  <a:pt x="2308791" y="1391510"/>
+                </a:lnTo>
+                <a:lnTo>
+                  <a:pt x="2324391" y="1392273"/>
+                </a:lnTo>
+                <a:lnTo>
+                  <a:pt x="2339991" y="1393026"/>
+                </a:lnTo>
+                <a:lnTo>
+                  <a:pt x="2355591" y="1393771"/>
+                </a:lnTo>
+                <a:lnTo>
+                  <a:pt x="2371191" y="1394506"/>
+                </a:lnTo>
+                <a:lnTo>
+                  <a:pt x="2386791" y="1395232"/>
+                </a:lnTo>
+                <a:lnTo>
+                  <a:pt x="2402391" y="1395950"/>
+                </a:lnTo>
+                <a:lnTo>
+                  <a:pt x="2417991" y="1396659"/>
+                </a:lnTo>
+                <a:lnTo>
+                  <a:pt x="2433591" y="1397360"/>
+                </a:lnTo>
+                <a:lnTo>
+                  <a:pt x="2449191" y="1398052"/>
+                </a:lnTo>
+                <a:lnTo>
+                  <a:pt x="2464791" y="1398737"/>
+                </a:lnTo>
+                <a:lnTo>
+                  <a:pt x="2480390" y="1399413"/>
+                </a:lnTo>
+                <a:lnTo>
+                  <a:pt x="2495990" y="1400082"/>
+                </a:lnTo>
+                <a:lnTo>
+                  <a:pt x="2511590" y="1400743"/>
+                </a:lnTo>
+                <a:lnTo>
+                  <a:pt x="2527190" y="1401396"/>
+                </a:lnTo>
+                <a:lnTo>
+                  <a:pt x="2542790" y="1402042"/>
+                </a:lnTo>
+                <a:lnTo>
+                  <a:pt x="2558390" y="1402681"/>
+                </a:lnTo>
+                <a:lnTo>
+                  <a:pt x="2573990" y="1403312"/>
+                </a:lnTo>
+                <a:lnTo>
+                  <a:pt x="2589590" y="1403937"/>
+                </a:lnTo>
+                <a:lnTo>
+                  <a:pt x="2605190" y="1404554"/>
+                </a:lnTo>
+                <a:lnTo>
+                  <a:pt x="2620790" y="1405165"/>
+                </a:lnTo>
+                <a:lnTo>
+                  <a:pt x="2636390" y="1405769"/>
+                </a:lnTo>
+                <a:lnTo>
+                  <a:pt x="2651990" y="1406367"/>
+                </a:lnTo>
+                <a:lnTo>
+                  <a:pt x="2667590" y="1406957"/>
+                </a:lnTo>
+                <a:lnTo>
+                  <a:pt x="2683190" y="1407542"/>
+                </a:lnTo>
+                <a:lnTo>
+                  <a:pt x="2698790" y="1408120"/>
+                </a:lnTo>
+                <a:lnTo>
+                  <a:pt x="2714390" y="1408692"/>
+                </a:lnTo>
+                <a:lnTo>
+                  <a:pt x="2729990" y="1409258"/>
+                </a:lnTo>
+                <a:lnTo>
+                  <a:pt x="2745589" y="1409818"/>
+                </a:lnTo>
+                <a:lnTo>
+                  <a:pt x="2761189" y="1410373"/>
+                </a:lnTo>
+                <a:lnTo>
+                  <a:pt x="2776789" y="1410921"/>
+                </a:lnTo>
+                <a:lnTo>
+                  <a:pt x="2792389" y="1411464"/>
+                </a:lnTo>
+                <a:lnTo>
+                  <a:pt x="2807989" y="1412001"/>
+                </a:lnTo>
+                <a:lnTo>
+                  <a:pt x="2823589" y="1412532"/>
+                </a:lnTo>
+                <a:lnTo>
+                  <a:pt x="2839189" y="1413058"/>
+                </a:lnTo>
+                <a:lnTo>
+                  <a:pt x="2854789" y="1413579"/>
+                </a:lnTo>
+                <a:lnTo>
+                  <a:pt x="2870389" y="1414094"/>
+                </a:lnTo>
+                <a:lnTo>
+                  <a:pt x="2885989" y="1414604"/>
+                </a:lnTo>
+                <a:lnTo>
+                  <a:pt x="2901589" y="1415109"/>
+                </a:lnTo>
+                <a:lnTo>
+                  <a:pt x="2917189" y="1415610"/>
+                </a:lnTo>
+                <a:lnTo>
+                  <a:pt x="2932789" y="1416105"/>
+                </a:lnTo>
+                <a:lnTo>
+                  <a:pt x="2948389" y="1416595"/>
+                </a:lnTo>
+                <a:lnTo>
+                  <a:pt x="2963989" y="1417080"/>
+                </a:lnTo>
+                <a:lnTo>
+                  <a:pt x="2979589" y="1417561"/>
+                </a:lnTo>
+                <a:lnTo>
+                  <a:pt x="2995189" y="1418037"/>
+                </a:lnTo>
+              </a:path>
+            </a:pathLst>
+          </a:custGeom>
+          <a:noFill/>
+          <a:ln w="38100">
             <a:solidFill>
-              <a:srgbClr val="8EDBD4"/>
+              <a:srgbClr val="F28BA0"/>
             </a:solidFill>
           </a:ln>
           <a:effectLst/>
         </p:spPr>
-      </p:cxnSp>
-      <p:cxnSp>
-        <p:nvCxnSpPr>
-          <p:cNvPr id="32" name="C4-E14 line 30" descr="sci-ppt:o030"/>
-          <p:cNvCxnSpPr/>
+        <p:txBody>
+          <a:bodyPr rtlCol="0" anchor="ctr"/>
+          <a:lstStyle/>
+          <a:p>
+            <a:pPr algn="ctr"/>
+          </a:p>
+        </p:txBody>
+      </p:sp>
+      <p:sp>
+        <p:nvSpPr>
+          <p:cNvPr id="35" name="C4-E14 text 33" descr="sci-ppt:o033"/>
+          <p:cNvSpPr txBox="1"/>
           <p:nvPr/>
-        </p:nvCxnSpPr>
-        <p:spPr>
-          <a:xfrm flipV="1">
-            <a:off x="3150108" y="1552104"/>
-            <a:ext cx="76581" cy="40991"/>
-          </a:xfrm>
-          <a:prstGeom prst="line">
+        </p:nvSpPr>
+        <p:spPr>
+          <a:xfrm>
+            <a:off x="9057132" y="1754505"/>
+            <a:ext cx="1828800" cy="223900"/>
+          </a:xfrm>
+          <a:prstGeom prst="rect">
             <a:avLst/>
           </a:prstGeom>
-          <a:ln w="25400">
-            <a:solidFill>
-              <a:srgbClr val="8EDBD4"/>
-            </a:solidFill>
-          </a:ln>
+          <a:noFill/>
           <a:effectLst/>
         </p:spPr>
-      </p:cxnSp>
-      <p:cxnSp>
-        <p:nvCxnSpPr>
-          <p:cNvPr id="33" name="C4-E14 line 31" descr="sci-ppt:o031"/>
-          <p:cNvCxnSpPr/>
+        <p:txBody>
+          <a:bodyPr wrap="none" lIns="18288" rIns="18288" tIns="18288" bIns="18288" anchor="t">
+            <a:spAutoFit/>
+          </a:bodyPr>
+          <a:lstStyle/>
+          <a:p>
+            <a:pPr algn="l">
+              <a:spcAft>
+                <a:spcPts val="0"/>
+              </a:spcAft>
+            </a:pPr>
+            <a:r>
+              <a:rPr sz="1150" b="0" i="0">
+                <a:solidFill>
+                  <a:srgbClr val="F28BA0"/>
+                </a:solidFill>
+                <a:latin typeface="Arial"/>
+              </a:rPr>
+              <a:t>C₁/r diverges</a:t>
+            </a:r>
+          </a:p>
+        </p:txBody>
+      </p:sp>
+      <p:sp>
+        <p:nvSpPr>
+          <p:cNvPr id="36" name="C4-E14 text 34" descr="sci-ppt:o034"/>
+          <p:cNvSpPr txBox="1"/>
           <p:nvPr/>
-        </p:nvCxnSpPr>
-        <p:spPr>
-          <a:xfrm flipV="1">
-            <a:off x="3226689" y="1514117"/>
-            <a:ext cx="76581" cy="37987"/>
-          </a:xfrm>
-          <a:prstGeom prst="line">
+        </p:nvSpPr>
+        <p:spPr>
+          <a:xfrm>
+            <a:off x="9857232" y="3217545"/>
+            <a:ext cx="1828800" cy="223900"/>
+          </a:xfrm>
+          <a:prstGeom prst="rect">
             <a:avLst/>
           </a:prstGeom>
-          <a:ln w="25400">
-            <a:solidFill>
-              <a:srgbClr val="8EDBD4"/>
-            </a:solidFill>
-          </a:ln>
+          <a:noFill/>
           <a:effectLst/>
         </p:spPr>
-      </p:cxnSp>
-      <p:cxnSp>
-        <p:nvCxnSpPr>
-          <p:cNvPr id="34" name="C4-E14 line 32" descr="sci-ppt:o032"/>
-          <p:cNvCxnSpPr/>
-          <p:nvPr/>
-        </p:nvCxnSpPr>
-        <p:spPr>
-          <a:xfrm flipV="1">
-            <a:off x="3303270" y="1479287"/>
-            <a:ext cx="76581" cy="34830"/>
-          </a:xfrm>
-          <a:prstGeom prst="line">
-            <a:avLst/>
-          </a:prstGeom>
-          <a:ln w="25400">
-            <a:solidFill>
-              <a:srgbClr val="8EDBD4"/>
-            </a:solidFill>
-          </a:ln>
-          <a:effectLst/>
-        </p:spPr>
-      </p:cxnSp>
-      <p:cxnSp>
-        <p:nvCxnSpPr>
-          <p:cNvPr id="35" name="C4-E14 line 33" descr="sci-ppt:o033"/>
-          <p:cNvCxnSpPr/>
-          <p:nvPr/>
-        </p:nvCxnSpPr>
-        <p:spPr>
-          <a:xfrm flipV="1">
-            <a:off x="3379851" y="1447751"/>
-            <a:ext cx="76581" cy="31536"/>
-          </a:xfrm>
-          <a:prstGeom prst="line">
-            <a:avLst/>
-          </a:prstGeom>
-          <a:ln w="25400">
-            <a:solidFill>
-              <a:srgbClr val="8EDBD4"/>
-            </a:solidFill>
-          </a:ln>
-          <a:effectLst/>
-        </p:spPr>
-      </p:cxnSp>
-      <p:cxnSp>
-        <p:nvCxnSpPr>
-          <p:cNvPr id="36" name="C4-E14 line 34" descr="sci-ppt:o034"/>
-          <p:cNvCxnSpPr/>
-          <p:nvPr/>
-        </p:nvCxnSpPr>
-        <p:spPr>
-          <a:xfrm flipV="1">
-            <a:off x="3456432" y="1419633"/>
-            <a:ext cx="76581" cy="28118"/>
-          </a:xfrm>
-          <a:prstGeom prst="line">
-            <a:avLst/>
-          </a:prstGeom>
-          <a:ln w="25400">
-            <a:solidFill>
-              <a:srgbClr val="8EDBD4"/>
-            </a:solidFill>
-          </a:ln>
-          <a:effectLst/>
-        </p:spPr>
-      </p:cxnSp>
+        <p:txBody>
+          <a:bodyPr wrap="none" lIns="18288" rIns="18288" tIns="18288" bIns="18288" anchor="t">
+            <a:spAutoFit/>
+          </a:bodyPr>
+          <a:lstStyle/>
+          <a:p>
+            <a:pPr algn="l">
+              <a:spcAft>
+                <a:spcPts val="0"/>
+              </a:spcAft>
+            </a:pPr>
+            <a:r>
+              <a:rPr sz="1150" b="0" i="0">
+                <a:solidFill>
+                  <a:srgbClr val="8EDBD4"/>
+                </a:solidFill>
+                <a:latin typeface="Arial"/>
+              </a:rPr>
+              <a:t>regular: C₁ = 0</a:t>
+            </a:r>
+          </a:p>
+        </p:txBody>
+      </p:sp>
       <p:cxnSp>
         <p:nvCxnSpPr>
           <p:cNvPr id="37" name="C4-E14 line 35" descr="sci-ppt:o035"/>
@@ -3891,14 +4846,14 @@
           <p:nvPr/>
         </p:nvCxnSpPr>
         <p:spPr>
-          <a:xfrm flipV="1">
-            <a:off x="3533013" y="1395044"/>
-            <a:ext cx="76581" cy="24589"/>
+          <a:xfrm>
+            <a:off x="8503920" y="3017520"/>
+            <a:ext cx="3200400" cy="0"/>
           </a:xfrm>
           <a:prstGeom prst="line">
             <a:avLst/>
           </a:prstGeom>
-          <a:ln w="25400">
+          <a:ln w="31750">
             <a:solidFill>
               <a:srgbClr val="8EDBD4"/>
             </a:solidFill>
@@ -3906,1116 +4861,16 @@
           <a:effectLst/>
         </p:spPr>
       </p:cxnSp>
-      <p:cxnSp>
-        <p:nvCxnSpPr>
-          <p:cNvPr id="38" name="C4-E14 line 36" descr="sci-ppt:o036"/>
-          <p:cNvCxnSpPr/>
-          <p:nvPr/>
-        </p:nvCxnSpPr>
-        <p:spPr>
-          <a:xfrm flipV="1">
-            <a:off x="3609594" y="1374077"/>
-            <a:ext cx="76581" cy="20967"/>
-          </a:xfrm>
-          <a:prstGeom prst="line">
-            <a:avLst/>
-          </a:prstGeom>
-          <a:ln w="25400">
-            <a:solidFill>
-              <a:srgbClr val="8EDBD4"/>
-            </a:solidFill>
-          </a:ln>
-          <a:effectLst/>
-        </p:spPr>
-      </p:cxnSp>
-      <p:cxnSp>
-        <p:nvCxnSpPr>
-          <p:cNvPr id="39" name="C4-E14 line 37" descr="sci-ppt:o037"/>
-          <p:cNvCxnSpPr/>
-          <p:nvPr/>
-        </p:nvCxnSpPr>
-        <p:spPr>
-          <a:xfrm flipV="1">
-            <a:off x="3686175" y="1356814"/>
-            <a:ext cx="76581" cy="17263"/>
-          </a:xfrm>
-          <a:prstGeom prst="line">
-            <a:avLst/>
-          </a:prstGeom>
-          <a:ln w="25400">
-            <a:solidFill>
-              <a:srgbClr val="8EDBD4"/>
-            </a:solidFill>
-          </a:ln>
-          <a:effectLst/>
-        </p:spPr>
-      </p:cxnSp>
-      <p:cxnSp>
-        <p:nvCxnSpPr>
-          <p:cNvPr id="40" name="C4-E14 line 38" descr="sci-ppt:o038"/>
-          <p:cNvCxnSpPr/>
-          <p:nvPr/>
-        </p:nvCxnSpPr>
-        <p:spPr>
-          <a:xfrm flipV="1">
-            <a:off x="3762756" y="1343318"/>
-            <a:ext cx="76581" cy="13496"/>
-          </a:xfrm>
-          <a:prstGeom prst="line">
-            <a:avLst/>
-          </a:prstGeom>
-          <a:ln w="25400">
-            <a:solidFill>
-              <a:srgbClr val="8EDBD4"/>
-            </a:solidFill>
-          </a:ln>
-          <a:effectLst/>
-        </p:spPr>
-      </p:cxnSp>
-      <p:cxnSp>
-        <p:nvCxnSpPr>
-          <p:cNvPr id="41" name="C4-E14 line 39" descr="sci-ppt:o039"/>
-          <p:cNvCxnSpPr/>
-          <p:nvPr/>
-        </p:nvCxnSpPr>
-        <p:spPr>
-          <a:xfrm flipV="1">
-            <a:off x="3839337" y="1333642"/>
-            <a:ext cx="76581" cy="9676"/>
-          </a:xfrm>
-          <a:prstGeom prst="line">
-            <a:avLst/>
-          </a:prstGeom>
-          <a:ln w="25400">
-            <a:solidFill>
-              <a:srgbClr val="8EDBD4"/>
-            </a:solidFill>
-          </a:ln>
-          <a:effectLst/>
-        </p:spPr>
-      </p:cxnSp>
-      <p:cxnSp>
-        <p:nvCxnSpPr>
-          <p:cNvPr id="42" name="C4-E14 line 40" descr="sci-ppt:o040"/>
-          <p:cNvCxnSpPr/>
-          <p:nvPr/>
-        </p:nvCxnSpPr>
-        <p:spPr>
-          <a:xfrm flipV="1">
-            <a:off x="3915918" y="1327822"/>
-            <a:ext cx="76581" cy="5820"/>
-          </a:xfrm>
-          <a:prstGeom prst="line">
-            <a:avLst/>
-          </a:prstGeom>
-          <a:ln w="25400">
-            <a:solidFill>
-              <a:srgbClr val="8EDBD4"/>
-            </a:solidFill>
-          </a:ln>
-          <a:effectLst/>
-        </p:spPr>
-      </p:cxnSp>
-      <p:cxnSp>
-        <p:nvCxnSpPr>
-          <p:cNvPr id="43" name="C4-E14 line 41" descr="sci-ppt:o041"/>
-          <p:cNvCxnSpPr/>
-          <p:nvPr/>
-        </p:nvCxnSpPr>
-        <p:spPr>
-          <a:xfrm flipV="1">
-            <a:off x="3992499" y="1325880"/>
-            <a:ext cx="76581" cy="1942"/>
-          </a:xfrm>
-          <a:prstGeom prst="line">
-            <a:avLst/>
-          </a:prstGeom>
-          <a:ln w="25400">
-            <a:solidFill>
-              <a:srgbClr val="8EDBD4"/>
-            </a:solidFill>
-          </a:ln>
-          <a:effectLst/>
-        </p:spPr>
-      </p:cxnSp>
-      <p:cxnSp>
-        <p:nvCxnSpPr>
-          <p:cNvPr id="44" name="C4-E14 line 42" descr="sci-ppt:o042"/>
-          <p:cNvCxnSpPr/>
-          <p:nvPr/>
-        </p:nvCxnSpPr>
-        <p:spPr>
-          <a:xfrm>
-            <a:off x="4069080" y="1325880"/>
-            <a:ext cx="76580" cy="1942"/>
-          </a:xfrm>
-          <a:prstGeom prst="line">
-            <a:avLst/>
-          </a:prstGeom>
-          <a:ln w="25400">
-            <a:solidFill>
-              <a:srgbClr val="8EDBD4"/>
-            </a:solidFill>
-          </a:ln>
-          <a:effectLst/>
-        </p:spPr>
-      </p:cxnSp>
-      <p:cxnSp>
-        <p:nvCxnSpPr>
-          <p:cNvPr id="45" name="C4-E14 line 43" descr="sci-ppt:o043"/>
-          <p:cNvCxnSpPr/>
-          <p:nvPr/>
-        </p:nvCxnSpPr>
-        <p:spPr>
-          <a:xfrm>
-            <a:off x="4145660" y="1327822"/>
-            <a:ext cx="76582" cy="5820"/>
-          </a:xfrm>
-          <a:prstGeom prst="line">
-            <a:avLst/>
-          </a:prstGeom>
-          <a:ln w="25400">
-            <a:solidFill>
-              <a:srgbClr val="8EDBD4"/>
-            </a:solidFill>
-          </a:ln>
-          <a:effectLst/>
-        </p:spPr>
-      </p:cxnSp>
-      <p:cxnSp>
-        <p:nvCxnSpPr>
-          <p:cNvPr id="46" name="C4-E14 line 44" descr="sci-ppt:o044"/>
-          <p:cNvCxnSpPr/>
-          <p:nvPr/>
-        </p:nvCxnSpPr>
-        <p:spPr>
-          <a:xfrm>
-            <a:off x="4222242" y="1333642"/>
-            <a:ext cx="76581" cy="9676"/>
-          </a:xfrm>
-          <a:prstGeom prst="line">
-            <a:avLst/>
-          </a:prstGeom>
-          <a:ln w="25400">
-            <a:solidFill>
-              <a:srgbClr val="8EDBD4"/>
-            </a:solidFill>
-          </a:ln>
-          <a:effectLst/>
-        </p:spPr>
-      </p:cxnSp>
-      <p:cxnSp>
-        <p:nvCxnSpPr>
-          <p:cNvPr id="47" name="C4-E14 line 45" descr="sci-ppt:o045"/>
-          <p:cNvCxnSpPr/>
-          <p:nvPr/>
-        </p:nvCxnSpPr>
-        <p:spPr>
-          <a:xfrm>
-            <a:off x="4298823" y="1343318"/>
-            <a:ext cx="76581" cy="13496"/>
-          </a:xfrm>
-          <a:prstGeom prst="line">
-            <a:avLst/>
-          </a:prstGeom>
-          <a:ln w="25400">
-            <a:solidFill>
-              <a:srgbClr val="8EDBD4"/>
-            </a:solidFill>
-          </a:ln>
-          <a:effectLst/>
-        </p:spPr>
-      </p:cxnSp>
-      <p:cxnSp>
-        <p:nvCxnSpPr>
-          <p:cNvPr id="48" name="C4-E14 line 46" descr="sci-ppt:o046"/>
-          <p:cNvCxnSpPr/>
-          <p:nvPr/>
-        </p:nvCxnSpPr>
-        <p:spPr>
-          <a:xfrm>
-            <a:off x="4375404" y="1356814"/>
-            <a:ext cx="76581" cy="17263"/>
-          </a:xfrm>
-          <a:prstGeom prst="line">
-            <a:avLst/>
-          </a:prstGeom>
-          <a:ln w="25400">
-            <a:solidFill>
-              <a:srgbClr val="8EDBD4"/>
-            </a:solidFill>
-          </a:ln>
-          <a:effectLst/>
-        </p:spPr>
-      </p:cxnSp>
-      <p:cxnSp>
-        <p:nvCxnSpPr>
-          <p:cNvPr id="49" name="C4-E14 line 47" descr="sci-ppt:o047"/>
-          <p:cNvCxnSpPr/>
-          <p:nvPr/>
-        </p:nvCxnSpPr>
-        <p:spPr>
-          <a:xfrm>
-            <a:off x="4451985" y="1374077"/>
-            <a:ext cx="76581" cy="20967"/>
-          </a:xfrm>
-          <a:prstGeom prst="line">
-            <a:avLst/>
-          </a:prstGeom>
-          <a:ln w="25400">
-            <a:solidFill>
-              <a:srgbClr val="8EDBD4"/>
-            </a:solidFill>
-          </a:ln>
-          <a:effectLst/>
-        </p:spPr>
-      </p:cxnSp>
-      <p:cxnSp>
-        <p:nvCxnSpPr>
-          <p:cNvPr id="50" name="C4-E14 line 48" descr="sci-ppt:o048"/>
-          <p:cNvCxnSpPr/>
-          <p:nvPr/>
-        </p:nvCxnSpPr>
-        <p:spPr>
-          <a:xfrm>
-            <a:off x="4528566" y="1395044"/>
-            <a:ext cx="76581" cy="24589"/>
-          </a:xfrm>
-          <a:prstGeom prst="line">
-            <a:avLst/>
-          </a:prstGeom>
-          <a:ln w="25400">
-            <a:solidFill>
-              <a:srgbClr val="8EDBD4"/>
-            </a:solidFill>
-          </a:ln>
-          <a:effectLst/>
-        </p:spPr>
-      </p:cxnSp>
-      <p:cxnSp>
-        <p:nvCxnSpPr>
-          <p:cNvPr id="51" name="C4-E14 line 49" descr="sci-ppt:o049"/>
-          <p:cNvCxnSpPr/>
-          <p:nvPr/>
-        </p:nvCxnSpPr>
-        <p:spPr>
-          <a:xfrm>
-            <a:off x="4605147" y="1419633"/>
-            <a:ext cx="76581" cy="28118"/>
-          </a:xfrm>
-          <a:prstGeom prst="line">
-            <a:avLst/>
-          </a:prstGeom>
-          <a:ln w="25400">
-            <a:solidFill>
-              <a:srgbClr val="8EDBD4"/>
-            </a:solidFill>
-          </a:ln>
-          <a:effectLst/>
-        </p:spPr>
-      </p:cxnSp>
-      <p:cxnSp>
-        <p:nvCxnSpPr>
-          <p:cNvPr id="52" name="C4-E14 line 50" descr="sci-ppt:o050"/>
-          <p:cNvCxnSpPr/>
-          <p:nvPr/>
-        </p:nvCxnSpPr>
-        <p:spPr>
-          <a:xfrm>
-            <a:off x="4681728" y="1447751"/>
-            <a:ext cx="76580" cy="31536"/>
-          </a:xfrm>
-          <a:prstGeom prst="line">
-            <a:avLst/>
-          </a:prstGeom>
-          <a:ln w="25400">
-            <a:solidFill>
-              <a:srgbClr val="8EDBD4"/>
-            </a:solidFill>
-          </a:ln>
-          <a:effectLst/>
-        </p:spPr>
-      </p:cxnSp>
-      <p:cxnSp>
-        <p:nvCxnSpPr>
-          <p:cNvPr id="53" name="C4-E14 line 51" descr="sci-ppt:o051"/>
-          <p:cNvCxnSpPr/>
-          <p:nvPr/>
-        </p:nvCxnSpPr>
-        <p:spPr>
-          <a:xfrm>
-            <a:off x="4758308" y="1479287"/>
-            <a:ext cx="76582" cy="34830"/>
-          </a:xfrm>
-          <a:prstGeom prst="line">
-            <a:avLst/>
-          </a:prstGeom>
-          <a:ln w="25400">
-            <a:solidFill>
-              <a:srgbClr val="8EDBD4"/>
-            </a:solidFill>
-          </a:ln>
-          <a:effectLst/>
-        </p:spPr>
-      </p:cxnSp>
-      <p:cxnSp>
-        <p:nvCxnSpPr>
-          <p:cNvPr id="54" name="C4-E14 line 52" descr="sci-ppt:o052"/>
-          <p:cNvCxnSpPr/>
-          <p:nvPr/>
-        </p:nvCxnSpPr>
-        <p:spPr>
-          <a:xfrm>
-            <a:off x="4834890" y="1514117"/>
-            <a:ext cx="76581" cy="37987"/>
-          </a:xfrm>
-          <a:prstGeom prst="line">
-            <a:avLst/>
-          </a:prstGeom>
-          <a:ln w="25400">
-            <a:solidFill>
-              <a:srgbClr val="8EDBD4"/>
-            </a:solidFill>
-          </a:ln>
-          <a:effectLst/>
-        </p:spPr>
-      </p:cxnSp>
-      <p:cxnSp>
-        <p:nvCxnSpPr>
-          <p:cNvPr id="55" name="C4-E14 line 53" descr="sci-ppt:o053"/>
-          <p:cNvCxnSpPr/>
-          <p:nvPr/>
-        </p:nvCxnSpPr>
-        <p:spPr>
-          <a:xfrm>
-            <a:off x="4911471" y="1552104"/>
-            <a:ext cx="76581" cy="40991"/>
-          </a:xfrm>
-          <a:prstGeom prst="line">
-            <a:avLst/>
-          </a:prstGeom>
-          <a:ln w="25400">
-            <a:solidFill>
-              <a:srgbClr val="8EDBD4"/>
-            </a:solidFill>
-          </a:ln>
-          <a:effectLst/>
-        </p:spPr>
-      </p:cxnSp>
-      <p:cxnSp>
-        <p:nvCxnSpPr>
-          <p:cNvPr id="56" name="C4-E14 line 54" descr="sci-ppt:o054"/>
-          <p:cNvCxnSpPr/>
-          <p:nvPr/>
-        </p:nvCxnSpPr>
-        <p:spPr>
-          <a:xfrm>
-            <a:off x="4988052" y="1593095"/>
-            <a:ext cx="76581" cy="43826"/>
-          </a:xfrm>
-          <a:prstGeom prst="line">
-            <a:avLst/>
-          </a:prstGeom>
-          <a:ln w="25400">
-            <a:solidFill>
-              <a:srgbClr val="8EDBD4"/>
-            </a:solidFill>
-          </a:ln>
-          <a:effectLst/>
-        </p:spPr>
-      </p:cxnSp>
-      <p:cxnSp>
-        <p:nvCxnSpPr>
-          <p:cNvPr id="57" name="C4-E14 line 55" descr="sci-ppt:o055"/>
-          <p:cNvCxnSpPr/>
-          <p:nvPr/>
-        </p:nvCxnSpPr>
-        <p:spPr>
-          <a:xfrm>
-            <a:off x="5064633" y="1636921"/>
-            <a:ext cx="76581" cy="46479"/>
-          </a:xfrm>
-          <a:prstGeom prst="line">
-            <a:avLst/>
-          </a:prstGeom>
-          <a:ln w="25400">
-            <a:solidFill>
-              <a:srgbClr val="8EDBD4"/>
-            </a:solidFill>
-          </a:ln>
-          <a:effectLst/>
-        </p:spPr>
-      </p:cxnSp>
-      <p:cxnSp>
-        <p:nvCxnSpPr>
-          <p:cNvPr id="58" name="C4-E14 line 56" descr="sci-ppt:o056"/>
-          <p:cNvCxnSpPr/>
-          <p:nvPr/>
-        </p:nvCxnSpPr>
-        <p:spPr>
-          <a:xfrm>
-            <a:off x="5141214" y="1683400"/>
-            <a:ext cx="76581" cy="48937"/>
-          </a:xfrm>
-          <a:prstGeom prst="line">
-            <a:avLst/>
-          </a:prstGeom>
-          <a:ln w="25400">
-            <a:solidFill>
-              <a:srgbClr val="8EDBD4"/>
-            </a:solidFill>
-          </a:ln>
-          <a:effectLst/>
-        </p:spPr>
-      </p:cxnSp>
-      <p:cxnSp>
-        <p:nvCxnSpPr>
-          <p:cNvPr id="59" name="C4-E14 line 57" descr="sci-ppt:o057"/>
-          <p:cNvCxnSpPr/>
-          <p:nvPr/>
-        </p:nvCxnSpPr>
-        <p:spPr>
-          <a:xfrm>
-            <a:off x="5217795" y="1732337"/>
-            <a:ext cx="76580" cy="51181"/>
-          </a:xfrm>
-          <a:prstGeom prst="line">
-            <a:avLst/>
-          </a:prstGeom>
-          <a:ln w="25400">
-            <a:solidFill>
-              <a:srgbClr val="8EDBD4"/>
-            </a:solidFill>
-          </a:ln>
-          <a:effectLst/>
-        </p:spPr>
-      </p:cxnSp>
-      <p:cxnSp>
-        <p:nvCxnSpPr>
-          <p:cNvPr id="60" name="C4-E14 line 58" descr="sci-ppt:o058"/>
-          <p:cNvCxnSpPr/>
-          <p:nvPr/>
-        </p:nvCxnSpPr>
-        <p:spPr>
-          <a:xfrm>
-            <a:off x="5294375" y="1783518"/>
-            <a:ext cx="76582" cy="53202"/>
-          </a:xfrm>
-          <a:prstGeom prst="line">
-            <a:avLst/>
-          </a:prstGeom>
-          <a:ln w="25400">
-            <a:solidFill>
-              <a:srgbClr val="8EDBD4"/>
-            </a:solidFill>
-          </a:ln>
-          <a:effectLst/>
-        </p:spPr>
-      </p:cxnSp>
-      <p:cxnSp>
-        <p:nvCxnSpPr>
-          <p:cNvPr id="61" name="C4-E14 line 59" descr="sci-ppt:o059"/>
-          <p:cNvCxnSpPr/>
-          <p:nvPr/>
-        </p:nvCxnSpPr>
-        <p:spPr>
-          <a:xfrm>
-            <a:off x="5370957" y="1836720"/>
-            <a:ext cx="76581" cy="54981"/>
-          </a:xfrm>
-          <a:prstGeom prst="line">
-            <a:avLst/>
-          </a:prstGeom>
-          <a:ln w="25400">
-            <a:solidFill>
-              <a:srgbClr val="8EDBD4"/>
-            </a:solidFill>
-          </a:ln>
-          <a:effectLst/>
-        </p:spPr>
-      </p:cxnSp>
-      <p:cxnSp>
-        <p:nvCxnSpPr>
-          <p:cNvPr id="62" name="C4-E14 line 60" descr="sci-ppt:o060"/>
-          <p:cNvCxnSpPr/>
-          <p:nvPr/>
-        </p:nvCxnSpPr>
-        <p:spPr>
-          <a:xfrm>
-            <a:off x="5447538" y="1891701"/>
-            <a:ext cx="76581" cy="56504"/>
-          </a:xfrm>
-          <a:prstGeom prst="line">
-            <a:avLst/>
-          </a:prstGeom>
-          <a:ln w="25400">
-            <a:solidFill>
-              <a:srgbClr val="8EDBD4"/>
-            </a:solidFill>
-          </a:ln>
-          <a:effectLst/>
-        </p:spPr>
-      </p:cxnSp>
-      <p:cxnSp>
-        <p:nvCxnSpPr>
-          <p:cNvPr id="63" name="C4-E14 line 61" descr="sci-ppt:o061"/>
-          <p:cNvCxnSpPr/>
-          <p:nvPr/>
-        </p:nvCxnSpPr>
-        <p:spPr>
-          <a:xfrm>
-            <a:off x="5524119" y="1948205"/>
-            <a:ext cx="76581" cy="57760"/>
-          </a:xfrm>
-          <a:prstGeom prst="line">
-            <a:avLst/>
-          </a:prstGeom>
-          <a:ln w="25400">
-            <a:solidFill>
-              <a:srgbClr val="8EDBD4"/>
-            </a:solidFill>
-          </a:ln>
-          <a:effectLst/>
-        </p:spPr>
-      </p:cxnSp>
-      <p:cxnSp>
-        <p:nvCxnSpPr>
-          <p:cNvPr id="64" name="C4-E14 line 62" descr="sci-ppt:o062"/>
-          <p:cNvCxnSpPr/>
-          <p:nvPr/>
-        </p:nvCxnSpPr>
-        <p:spPr>
-          <a:xfrm>
-            <a:off x="5600700" y="2005965"/>
-            <a:ext cx="76581" cy="58729"/>
-          </a:xfrm>
-          <a:prstGeom prst="line">
-            <a:avLst/>
-          </a:prstGeom>
-          <a:ln w="25400">
-            <a:solidFill>
-              <a:srgbClr val="8EDBD4"/>
-            </a:solidFill>
-          </a:ln>
-          <a:effectLst/>
-        </p:spPr>
-      </p:cxnSp>
-      <p:cxnSp>
-        <p:nvCxnSpPr>
-          <p:cNvPr id="65" name="C4-E14 line 63" descr="sci-ppt:o063"/>
-          <p:cNvCxnSpPr/>
-          <p:nvPr/>
-        </p:nvCxnSpPr>
-        <p:spPr>
-          <a:xfrm>
-            <a:off x="5677281" y="2064694"/>
-            <a:ext cx="76581" cy="59401"/>
-          </a:xfrm>
-          <a:prstGeom prst="line">
-            <a:avLst/>
-          </a:prstGeom>
-          <a:ln w="25400">
-            <a:solidFill>
-              <a:srgbClr val="8EDBD4"/>
-            </a:solidFill>
-          </a:ln>
-          <a:effectLst/>
-        </p:spPr>
-      </p:cxnSp>
-      <p:cxnSp>
-        <p:nvCxnSpPr>
-          <p:cNvPr id="66" name="C4-E14 line 64" descr="sci-ppt:o064"/>
-          <p:cNvCxnSpPr/>
-          <p:nvPr/>
-        </p:nvCxnSpPr>
-        <p:spPr>
-          <a:xfrm>
-            <a:off x="5753862" y="2124095"/>
-            <a:ext cx="76581" cy="59760"/>
-          </a:xfrm>
-          <a:prstGeom prst="line">
-            <a:avLst/>
-          </a:prstGeom>
-          <a:ln w="25400">
-            <a:solidFill>
-              <a:srgbClr val="8EDBD4"/>
-            </a:solidFill>
-          </a:ln>
-          <a:effectLst/>
-        </p:spPr>
-      </p:cxnSp>
-      <p:cxnSp>
-        <p:nvCxnSpPr>
-          <p:cNvPr id="67" name="C4-E14 line 65" descr="sci-ppt:o065"/>
-          <p:cNvCxnSpPr/>
-          <p:nvPr/>
-        </p:nvCxnSpPr>
-        <p:spPr>
-          <a:xfrm>
-            <a:off x="5830443" y="2183855"/>
-            <a:ext cx="76581" cy="59789"/>
-          </a:xfrm>
-          <a:prstGeom prst="line">
-            <a:avLst/>
-          </a:prstGeom>
-          <a:ln w="25400">
-            <a:solidFill>
-              <a:srgbClr val="8EDBD4"/>
-            </a:solidFill>
-          </a:ln>
-          <a:effectLst/>
-        </p:spPr>
-      </p:cxnSp>
-      <p:cxnSp>
-        <p:nvCxnSpPr>
-          <p:cNvPr id="68" name="C4-E14 line 66" descr="sci-ppt:o066"/>
-          <p:cNvCxnSpPr/>
-          <p:nvPr/>
-        </p:nvCxnSpPr>
-        <p:spPr>
-          <a:xfrm>
-            <a:off x="5907024" y="2243644"/>
-            <a:ext cx="76580" cy="59478"/>
-          </a:xfrm>
-          <a:prstGeom prst="line">
-            <a:avLst/>
-          </a:prstGeom>
-          <a:ln w="25400">
-            <a:solidFill>
-              <a:srgbClr val="8EDBD4"/>
-            </a:solidFill>
-          </a:ln>
-          <a:effectLst/>
-        </p:spPr>
-      </p:cxnSp>
-      <p:cxnSp>
-        <p:nvCxnSpPr>
-          <p:cNvPr id="69" name="C4-E14 line 67" descr="sci-ppt:o067"/>
-          <p:cNvCxnSpPr/>
-          <p:nvPr/>
-        </p:nvCxnSpPr>
-        <p:spPr>
-          <a:xfrm>
-            <a:off x="5983604" y="2303122"/>
-            <a:ext cx="76582" cy="58809"/>
-          </a:xfrm>
-          <a:prstGeom prst="line">
-            <a:avLst/>
-          </a:prstGeom>
-          <a:ln w="25400">
-            <a:solidFill>
-              <a:srgbClr val="8EDBD4"/>
-            </a:solidFill>
-          </a:ln>
-          <a:effectLst/>
-        </p:spPr>
-      </p:cxnSp>
-      <p:cxnSp>
-        <p:nvCxnSpPr>
-          <p:cNvPr id="70" name="C4-E14 line 68" descr="sci-ppt:o068"/>
-          <p:cNvCxnSpPr/>
-          <p:nvPr/>
-        </p:nvCxnSpPr>
-        <p:spPr>
-          <a:xfrm>
-            <a:off x="6060186" y="2361931"/>
-            <a:ext cx="76581" cy="57767"/>
-          </a:xfrm>
-          <a:prstGeom prst="line">
-            <a:avLst/>
-          </a:prstGeom>
-          <a:ln w="25400">
-            <a:solidFill>
-              <a:srgbClr val="8EDBD4"/>
-            </a:solidFill>
-          </a:ln>
-          <a:effectLst/>
-        </p:spPr>
-      </p:cxnSp>
-      <p:cxnSp>
-        <p:nvCxnSpPr>
-          <p:cNvPr id="71" name="C4-E14 line 69" descr="sci-ppt:o069"/>
-          <p:cNvCxnSpPr/>
-          <p:nvPr/>
-        </p:nvCxnSpPr>
-        <p:spPr>
-          <a:xfrm>
-            <a:off x="6136767" y="2419698"/>
-            <a:ext cx="76581" cy="56341"/>
-          </a:xfrm>
-          <a:prstGeom prst="line">
-            <a:avLst/>
-          </a:prstGeom>
-          <a:ln w="25400">
-            <a:solidFill>
-              <a:srgbClr val="8EDBD4"/>
-            </a:solidFill>
-          </a:ln>
-          <a:effectLst/>
-        </p:spPr>
-      </p:cxnSp>
-      <p:cxnSp>
-        <p:nvCxnSpPr>
-          <p:cNvPr id="72" name="C4-E14 line 70" descr="sci-ppt:o070"/>
-          <p:cNvCxnSpPr/>
-          <p:nvPr/>
-        </p:nvCxnSpPr>
-        <p:spPr>
-          <a:xfrm>
-            <a:off x="6213348" y="2476039"/>
-            <a:ext cx="76581" cy="54513"/>
-          </a:xfrm>
-          <a:prstGeom prst="line">
-            <a:avLst/>
-          </a:prstGeom>
-          <a:ln w="25400">
-            <a:solidFill>
-              <a:srgbClr val="8EDBD4"/>
-            </a:solidFill>
-          </a:ln>
-          <a:effectLst/>
-        </p:spPr>
-      </p:cxnSp>
-      <p:cxnSp>
-        <p:nvCxnSpPr>
-          <p:cNvPr id="73" name="C4-E14 line 71" descr="sci-ppt:o071"/>
-          <p:cNvCxnSpPr/>
-          <p:nvPr/>
-        </p:nvCxnSpPr>
-        <p:spPr>
-          <a:xfrm>
-            <a:off x="6289929" y="2530552"/>
-            <a:ext cx="76581" cy="52270"/>
-          </a:xfrm>
-          <a:prstGeom prst="line">
-            <a:avLst/>
-          </a:prstGeom>
-          <a:ln w="25400">
-            <a:solidFill>
-              <a:srgbClr val="8EDBD4"/>
-            </a:solidFill>
-          </a:ln>
-          <a:effectLst/>
-        </p:spPr>
-      </p:cxnSp>
-      <p:cxnSp>
-        <p:nvCxnSpPr>
-          <p:cNvPr id="74" name="C4-E14 line 72" descr="sci-ppt:o072"/>
-          <p:cNvCxnSpPr/>
-          <p:nvPr/>
-        </p:nvCxnSpPr>
-        <p:spPr>
-          <a:xfrm>
-            <a:off x="6366510" y="2582822"/>
-            <a:ext cx="76581" cy="49597"/>
-          </a:xfrm>
-          <a:prstGeom prst="line">
-            <a:avLst/>
-          </a:prstGeom>
-          <a:ln w="25400">
-            <a:solidFill>
-              <a:srgbClr val="8EDBD4"/>
-            </a:solidFill>
-          </a:ln>
-          <a:effectLst/>
-        </p:spPr>
-      </p:cxnSp>
-      <p:cxnSp>
-        <p:nvCxnSpPr>
-          <p:cNvPr id="75" name="C4-E14 line 73" descr="sci-ppt:o073"/>
-          <p:cNvCxnSpPr/>
-          <p:nvPr/>
-        </p:nvCxnSpPr>
-        <p:spPr>
-          <a:xfrm>
-            <a:off x="6443091" y="2632419"/>
-            <a:ext cx="76581" cy="46480"/>
-          </a:xfrm>
-          <a:prstGeom prst="line">
-            <a:avLst/>
-          </a:prstGeom>
-          <a:ln w="25400">
-            <a:solidFill>
-              <a:srgbClr val="8EDBD4"/>
-            </a:solidFill>
-          </a:ln>
-          <a:effectLst/>
-        </p:spPr>
-      </p:cxnSp>
-      <p:cxnSp>
-        <p:nvCxnSpPr>
-          <p:cNvPr id="76" name="C4-E14 line 74" descr="sci-ppt:o074"/>
-          <p:cNvCxnSpPr/>
-          <p:nvPr/>
-        </p:nvCxnSpPr>
-        <p:spPr>
-          <a:xfrm>
-            <a:off x="6519672" y="2678899"/>
-            <a:ext cx="76581" cy="42903"/>
-          </a:xfrm>
-          <a:prstGeom prst="line">
-            <a:avLst/>
-          </a:prstGeom>
-          <a:ln w="25400">
-            <a:solidFill>
-              <a:srgbClr val="8EDBD4"/>
-            </a:solidFill>
-          </a:ln>
-          <a:effectLst/>
-        </p:spPr>
-      </p:cxnSp>
-      <p:cxnSp>
-        <p:nvCxnSpPr>
-          <p:cNvPr id="77" name="C4-E14 line 75" descr="sci-ppt:o075"/>
-          <p:cNvCxnSpPr/>
-          <p:nvPr/>
-        </p:nvCxnSpPr>
-        <p:spPr>
-          <a:xfrm>
-            <a:off x="6596253" y="2721802"/>
-            <a:ext cx="76580" cy="38853"/>
-          </a:xfrm>
-          <a:prstGeom prst="line">
-            <a:avLst/>
-          </a:prstGeom>
-          <a:ln w="25400">
-            <a:solidFill>
-              <a:srgbClr val="8EDBD4"/>
-            </a:solidFill>
-          </a:ln>
-          <a:effectLst/>
-        </p:spPr>
-      </p:cxnSp>
-      <p:cxnSp>
-        <p:nvCxnSpPr>
-          <p:cNvPr id="78" name="C4-E14 line 76" descr="sci-ppt:o076"/>
-          <p:cNvCxnSpPr/>
-          <p:nvPr/>
-        </p:nvCxnSpPr>
-        <p:spPr>
-          <a:xfrm>
-            <a:off x="6672833" y="2760655"/>
-            <a:ext cx="76582" cy="34314"/>
-          </a:xfrm>
-          <a:prstGeom prst="line">
-            <a:avLst/>
-          </a:prstGeom>
-          <a:ln w="25400">
-            <a:solidFill>
-              <a:srgbClr val="8EDBD4"/>
-            </a:solidFill>
-          </a:ln>
-          <a:effectLst/>
-        </p:spPr>
-      </p:cxnSp>
-      <p:cxnSp>
-        <p:nvCxnSpPr>
-          <p:cNvPr id="79" name="C4-E14 line 77" descr="sci-ppt:o077"/>
-          <p:cNvCxnSpPr/>
-          <p:nvPr/>
-        </p:nvCxnSpPr>
-        <p:spPr>
-          <a:xfrm>
-            <a:off x="6749415" y="2794969"/>
-            <a:ext cx="76581" cy="29274"/>
-          </a:xfrm>
-          <a:prstGeom prst="line">
-            <a:avLst/>
-          </a:prstGeom>
-          <a:ln w="25400">
-            <a:solidFill>
-              <a:srgbClr val="8EDBD4"/>
-            </a:solidFill>
-          </a:ln>
-          <a:effectLst/>
-        </p:spPr>
-      </p:cxnSp>
-      <p:cxnSp>
-        <p:nvCxnSpPr>
-          <p:cNvPr id="80" name="C4-E14 line 78" descr="sci-ppt:o078"/>
-          <p:cNvCxnSpPr/>
-          <p:nvPr/>
-        </p:nvCxnSpPr>
-        <p:spPr>
-          <a:xfrm>
-            <a:off x="6825996" y="2824243"/>
-            <a:ext cx="76581" cy="23715"/>
-          </a:xfrm>
-          <a:prstGeom prst="line">
-            <a:avLst/>
-          </a:prstGeom>
-          <a:ln w="25400">
-            <a:solidFill>
-              <a:srgbClr val="8EDBD4"/>
-            </a:solidFill>
-          </a:ln>
-          <a:effectLst/>
-        </p:spPr>
-      </p:cxnSp>
-      <p:cxnSp>
-        <p:nvCxnSpPr>
-          <p:cNvPr id="81" name="C4-E14 line 79" descr="sci-ppt:o079"/>
-          <p:cNvCxnSpPr/>
-          <p:nvPr/>
-        </p:nvCxnSpPr>
-        <p:spPr>
-          <a:xfrm>
-            <a:off x="6902577" y="2847958"/>
-            <a:ext cx="76581" cy="17624"/>
-          </a:xfrm>
-          <a:prstGeom prst="line">
-            <a:avLst/>
-          </a:prstGeom>
-          <a:ln w="25400">
-            <a:solidFill>
-              <a:srgbClr val="8EDBD4"/>
-            </a:solidFill>
-          </a:ln>
-          <a:effectLst/>
-        </p:spPr>
-      </p:cxnSp>
-      <p:cxnSp>
-        <p:nvCxnSpPr>
-          <p:cNvPr id="82" name="C4-E14 line 80" descr="sci-ppt:o080"/>
-          <p:cNvCxnSpPr/>
-          <p:nvPr/>
-        </p:nvCxnSpPr>
-        <p:spPr>
-          <a:xfrm>
-            <a:off x="6979158" y="2865582"/>
-            <a:ext cx="76581" cy="10988"/>
-          </a:xfrm>
-          <a:prstGeom prst="line">
-            <a:avLst/>
-          </a:prstGeom>
-          <a:ln w="25400">
-            <a:solidFill>
-              <a:srgbClr val="8EDBD4"/>
-            </a:solidFill>
-          </a:ln>
-          <a:effectLst/>
-        </p:spPr>
-      </p:cxnSp>
-      <p:cxnSp>
-        <p:nvCxnSpPr>
-          <p:cNvPr id="83" name="C4-E14 line 81" descr="sci-ppt:o081"/>
-          <p:cNvCxnSpPr/>
-          <p:nvPr/>
-        </p:nvCxnSpPr>
-        <p:spPr>
-          <a:xfrm>
-            <a:off x="7055739" y="2876570"/>
-            <a:ext cx="76581" cy="3790"/>
-          </a:xfrm>
-          <a:prstGeom prst="line">
-            <a:avLst/>
-          </a:prstGeom>
-          <a:ln w="25400">
-            <a:solidFill>
-              <a:srgbClr val="8EDBD4"/>
-            </a:solidFill>
-          </a:ln>
-          <a:effectLst/>
-        </p:spPr>
-      </p:cxnSp>
-      <p:sp>
-        <p:nvSpPr>
-          <p:cNvPr id="84" name="C4-E14 rect 82" descr="sci-ppt:o082"/>
-          <p:cNvSpPr/>
-          <p:nvPr/>
-        </p:nvSpPr>
-        <p:spPr>
-          <a:xfrm>
-            <a:off x="777240" y="2651760"/>
-            <a:ext cx="274320" cy="457200"/>
-          </a:xfrm>
-          <a:prstGeom prst="rect">
-            <a:avLst/>
-          </a:prstGeom>
-          <a:solidFill>
-            <a:srgbClr val="213E4B"/>
-          </a:solidFill>
-          <a:ln w="19050">
-            <a:solidFill>
-              <a:srgbClr val="B4C7D2"/>
-            </a:solidFill>
-          </a:ln>
-          <a:effectLst/>
-        </p:spPr>
-        <p:txBody>
-          <a:bodyPr rtlCol="0" anchor="ctr"/>
-          <a:lstStyle/>
-          <a:p>
-            <a:pPr algn="ctr"/>
-          </a:p>
-        </p:txBody>
-      </p:sp>
-      <p:sp>
-        <p:nvSpPr>
-          <p:cNvPr id="85" name="C4-E14 rect 83" descr="sci-ppt:o083"/>
-          <p:cNvSpPr/>
-          <p:nvPr/>
-        </p:nvSpPr>
-        <p:spPr>
-          <a:xfrm>
-            <a:off x="7086600" y="2651760"/>
-            <a:ext cx="274320" cy="457200"/>
-          </a:xfrm>
-          <a:prstGeom prst="rect">
-            <a:avLst/>
-          </a:prstGeom>
-          <a:solidFill>
-            <a:srgbClr val="213E4B"/>
-          </a:solidFill>
-          <a:ln w="19050">
-            <a:solidFill>
-              <a:srgbClr val="B4C7D2"/>
-            </a:solidFill>
-          </a:ln>
-          <a:effectLst/>
-        </p:spPr>
-        <p:txBody>
-          <a:bodyPr rtlCol="0" anchor="ctr"/>
-          <a:lstStyle/>
-          <a:p>
-            <a:pPr algn="ctr"/>
-          </a:p>
-        </p:txBody>
-      </p:sp>
-      <p:cxnSp>
-        <p:nvCxnSpPr>
-          <p:cNvPr id="86" name="C4-E14 arrow 84" descr="sci-ppt:o084"/>
-          <p:cNvCxnSpPr/>
-          <p:nvPr/>
-        </p:nvCxnSpPr>
-        <p:spPr>
-          <a:xfrm flipV="1">
-            <a:off x="4069080" y="1371600"/>
-            <a:ext cx="0" cy="1463040"/>
-          </a:xfrm>
-          <a:prstGeom prst="line">
-            <a:avLst/>
-          </a:prstGeom>
-          <a:ln w="25400">
-            <a:solidFill>
-              <a:srgbClr val="8EDBD4"/>
-            </a:solidFill>
-            <a:headEnd type="none" w="med" len="med"/>
-            <a:tailEnd type="triangle" w="med" len="med"/>
-          </a:ln>
-          <a:effectLst/>
-        </p:spPr>
-      </p:cxnSp>
-      <p:sp>
-        <p:nvSpPr>
-          <p:cNvPr id="87" name="C4-E14 text 85" descr="sci-ppt:o085"/>
+      <p:sp>
+        <p:nvSpPr>
+          <p:cNvPr id="38" name="C4-E14 text 36" descr="sci-ppt:o036"/>
           <p:cNvSpPr txBox="1"/>
           <p:nvPr/>
         </p:nvSpPr>
         <p:spPr>
           <a:xfrm>
-            <a:off x="4206240" y="1920240"/>
-            <a:ext cx="2560320" cy="411480"/>
+            <a:off x="548640" y="4892040"/>
+            <a:ext cx="10972800" cy="239395"/>
           </a:xfrm>
           <a:prstGeom prst="rect">
             <a:avLst/>
@@ -5024,7 +4879,7 @@
           <a:effectLst/>
         </p:spPr>
         <p:txBody>
-          <a:bodyPr wrap="square" lIns="27432" rIns="27432" tIns="18288" bIns="18288" anchor="ctr">
+          <a:bodyPr wrap="none" lIns="18288" rIns="18288" tIns="18288" bIns="18288" anchor="t">
             <a:spAutoFit/>
           </a:bodyPr>
           <a:lstStyle/>
@@ -5035,99 +4890,27 @@
               </a:spcAft>
             </a:pPr>
             <a:r>
-              <a:rPr sz="1800" b="0" i="0">
+              <a:rPr sz="1250" b="0" i="0">
                 <a:solidFill>
                   <a:srgbClr val="E7F0F3"/>
                 </a:solidFill>
                 <a:latin typeface="Arial"/>
               </a:rPr>
-              <a:t>w(r) ↑</a:t>
-            </a:r>
-          </a:p>
-        </p:txBody>
-      </p:sp>
-      <p:cxnSp>
-        <p:nvCxnSpPr>
-          <p:cNvPr id="88" name="C4-E14 arrow 86" descr="sci-ppt:o086"/>
-          <p:cNvCxnSpPr/>
-          <p:nvPr/>
-        </p:nvCxnSpPr>
-        <p:spPr>
-          <a:xfrm flipV="1">
-            <a:off x="2286000" y="2971800"/>
-            <a:ext cx="0" cy="594360"/>
-          </a:xfrm>
-          <a:prstGeom prst="line">
-            <a:avLst/>
-          </a:prstGeom>
-          <a:ln w="25400">
-            <a:solidFill>
-              <a:srgbClr val="8EDBD4"/>
-            </a:solidFill>
-            <a:headEnd type="none" w="med" len="med"/>
-            <a:tailEnd type="triangle" w="med" len="med"/>
-          </a:ln>
-          <a:effectLst/>
-        </p:spPr>
-      </p:cxnSp>
-      <p:cxnSp>
-        <p:nvCxnSpPr>
-          <p:cNvPr id="89" name="C4-E14 arrow 87" descr="sci-ppt:o087"/>
-          <p:cNvCxnSpPr/>
-          <p:nvPr/>
-        </p:nvCxnSpPr>
-        <p:spPr>
-          <a:xfrm flipV="1">
-            <a:off x="4069080" y="2971800"/>
-            <a:ext cx="0" cy="594360"/>
-          </a:xfrm>
-          <a:prstGeom prst="line">
-            <a:avLst/>
-          </a:prstGeom>
-          <a:ln w="25400">
-            <a:solidFill>
-              <a:srgbClr val="8EDBD4"/>
-            </a:solidFill>
-            <a:headEnd type="none" w="med" len="med"/>
-            <a:tailEnd type="triangle" w="med" len="med"/>
-          </a:ln>
-          <a:effectLst/>
-        </p:spPr>
-      </p:cxnSp>
-      <p:cxnSp>
-        <p:nvCxnSpPr>
-          <p:cNvPr id="90" name="C4-E14 arrow 88" descr="sci-ppt:o088"/>
-          <p:cNvCxnSpPr/>
-          <p:nvPr/>
-        </p:nvCxnSpPr>
-        <p:spPr>
-          <a:xfrm flipV="1">
-            <a:off x="5852160" y="2971800"/>
-            <a:ext cx="0" cy="594360"/>
-          </a:xfrm>
-          <a:prstGeom prst="line">
-            <a:avLst/>
-          </a:prstGeom>
-          <a:ln w="25400">
-            <a:solidFill>
-              <a:srgbClr val="8EDBD4"/>
-            </a:solidFill>
-            <a:headEnd type="none" w="med" len="med"/>
-            <a:tailEnd type="triangle" w="med" len="med"/>
-          </a:ln>
-          <a:effectLst/>
-        </p:spPr>
-      </p:cxnSp>
-      <p:sp>
-        <p:nvSpPr>
-          <p:cNvPr id="91" name="C4-E14 text 89" descr="sci-ppt:o089"/>
+              <a:t>A term C₁/r would make the slope infinite at the centre of a smooth plate; the physical solution cannot contain it.</a:t>
+            </a:r>
+          </a:p>
+        </p:txBody>
+      </p:sp>
+      <p:sp>
+        <p:nvSpPr>
+          <p:cNvPr id="39" name="C4-E14 text 37" descr="sci-ppt:o037"/>
           <p:cNvSpPr txBox="1"/>
           <p:nvPr/>
         </p:nvSpPr>
         <p:spPr>
           <a:xfrm>
-            <a:off x="2834640" y="3611880"/>
-            <a:ext cx="3657600" cy="274320"/>
+            <a:off x="548640" y="5440680"/>
+            <a:ext cx="10972800" cy="239395"/>
           </a:xfrm>
           <a:prstGeom prst="rect">
             <a:avLst/>
@@ -5136,7 +4919,7 @@
           <a:effectLst/>
         </p:spPr>
         <p:txBody>
-          <a:bodyPr wrap="square" lIns="27432" rIns="27432" tIns="18288" bIns="18288" anchor="ctr">
+          <a:bodyPr wrap="none" lIns="18288" rIns="18288" tIns="18288" bIns="18288" anchor="t">
             <a:spAutoFit/>
           </a:bodyPr>
           <a:lstStyle/>
@@ -5147,49 +4930,27 @@
               </a:spcAft>
             </a:pPr>
             <a:r>
-              <a:rPr sz="1600" b="0" i="0">
+              <a:rPr sz="1250" b="0" i="0">
                 <a:solidFill>
-                  <a:srgbClr val="E7F0F3"/>
+                  <a:srgbClr val="F2B880"/>
                 </a:solidFill>
                 <a:latin typeface="Arial"/>
               </a:rPr>
-              <a:t>p₀: maintained pressure</a:t>
-            </a:r>
-          </a:p>
-        </p:txBody>
-      </p:sp>
-      <p:cxnSp>
-        <p:nvCxnSpPr>
-          <p:cNvPr id="92" name="C4-E14 line 90" descr="sci-ppt:o090"/>
-          <p:cNvCxnSpPr/>
-          <p:nvPr/>
-        </p:nvCxnSpPr>
-        <p:spPr>
-          <a:xfrm>
-            <a:off x="4069080" y="3200400"/>
-            <a:ext cx="3063240" cy="0"/>
-          </a:xfrm>
-          <a:prstGeom prst="line">
-            <a:avLst/>
-          </a:prstGeom>
-          <a:ln w="25400">
-            <a:solidFill>
-              <a:srgbClr val="8EDBD4"/>
-            </a:solidFill>
-          </a:ln>
-          <a:effectLst/>
-        </p:spPr>
-      </p:cxnSp>
-      <p:sp>
-        <p:nvSpPr>
-          <p:cNvPr id="93" name="C4-E14 text 91" descr="sci-ppt:o091"/>
+              <a:t>C₂ is still free: it will be fixed with the clamp conditions in Eq. C4-E16.</a:t>
+            </a:r>
+          </a:p>
+        </p:txBody>
+      </p:sp>
+      <p:sp>
+        <p:nvSpPr>
+          <p:cNvPr id="40" name="C4-E14 text 38" descr="sci-ppt:o038"/>
           <p:cNvSpPr txBox="1"/>
           <p:nvPr/>
         </p:nvSpPr>
         <p:spPr>
           <a:xfrm>
-            <a:off x="5486400" y="3246120"/>
-            <a:ext cx="914400" cy="274320"/>
+            <a:off x="320040" y="6510528"/>
+            <a:ext cx="11521440" cy="200660"/>
           </a:xfrm>
           <a:prstGeom prst="rect">
             <a:avLst/>
@@ -5198,523 +4959,7 @@
           <a:effectLst/>
         </p:spPr>
         <p:txBody>
-          <a:bodyPr wrap="square" lIns="27432" rIns="27432" tIns="18288" bIns="18288" anchor="ctr">
-            <a:spAutoFit/>
-          </a:bodyPr>
-          <a:lstStyle/>
-          <a:p>
-            <a:pPr algn="l">
-              <a:spcAft>
-                <a:spcPts val="0"/>
-              </a:spcAft>
-            </a:pPr>
-            <a:r>
-              <a:rPr sz="1600" b="0" i="0">
-                <a:solidFill>
-                  <a:srgbClr val="E7F0F3"/>
-                </a:solidFill>
-                <a:latin typeface="Arial"/>
-              </a:rPr>
-              <a:t>b</a:t>
-            </a:r>
-          </a:p>
-        </p:txBody>
-      </p:sp>
-      <p:sp>
-        <p:nvSpPr>
-          <p:cNvPr id="94" name="C4-E14 ellipse 92" descr="sci-ppt:o092"/>
-          <p:cNvSpPr/>
-          <p:nvPr/>
-        </p:nvSpPr>
-        <p:spPr>
-          <a:xfrm>
-            <a:off x="8686800" y="1097280"/>
-            <a:ext cx="1920240" cy="1920240"/>
-          </a:xfrm>
-          <a:prstGeom prst="ellipse">
-            <a:avLst/>
-          </a:prstGeom>
-          <a:noFill/>
-          <a:ln w="19050">
-            <a:solidFill>
-              <a:srgbClr val="B4C7D2"/>
-            </a:solidFill>
-          </a:ln>
-          <a:effectLst/>
-        </p:spPr>
-        <p:txBody>
-          <a:bodyPr rtlCol="0" anchor="ctr"/>
-          <a:lstStyle/>
-          <a:p>
-            <a:pPr algn="ctr"/>
-          </a:p>
-        </p:txBody>
-      </p:sp>
-      <p:cxnSp>
-        <p:nvCxnSpPr>
-          <p:cNvPr id="95" name="C4-E14 arrow 93" descr="sci-ppt:o093"/>
-          <p:cNvCxnSpPr/>
-          <p:nvPr/>
-        </p:nvCxnSpPr>
-        <p:spPr>
-          <a:xfrm>
-            <a:off x="9646920" y="2057400"/>
-            <a:ext cx="960120" cy="0"/>
-          </a:xfrm>
-          <a:prstGeom prst="line">
-            <a:avLst/>
-          </a:prstGeom>
-          <a:ln w="25400">
-            <a:solidFill>
-              <a:srgbClr val="8EDBD4"/>
-            </a:solidFill>
-            <a:headEnd type="none" w="med" len="med"/>
-            <a:tailEnd type="triangle" w="med" len="med"/>
-          </a:ln>
-          <a:effectLst/>
-        </p:spPr>
-      </p:cxnSp>
-      <p:sp>
-        <p:nvSpPr>
-          <p:cNvPr id="96" name="C4-E14 text 94" descr="sci-ppt:o094"/>
-          <p:cNvSpPr txBox="1"/>
-          <p:nvPr/>
-        </p:nvSpPr>
-        <p:spPr>
-          <a:xfrm>
-            <a:off x="9875520" y="1645920"/>
-            <a:ext cx="914400" cy="274320"/>
-          </a:xfrm>
-          <a:prstGeom prst="rect">
-            <a:avLst/>
-          </a:prstGeom>
-          <a:noFill/>
-          <a:effectLst/>
-        </p:spPr>
-        <p:txBody>
-          <a:bodyPr wrap="square" lIns="27432" rIns="27432" tIns="18288" bIns="18288" anchor="ctr">
-            <a:spAutoFit/>
-          </a:bodyPr>
-          <a:lstStyle/>
-          <a:p>
-            <a:pPr algn="l">
-              <a:spcAft>
-                <a:spcPts val="0"/>
-              </a:spcAft>
-            </a:pPr>
-            <a:r>
-              <a:rPr sz="1700" b="0" i="0">
-                <a:solidFill>
-                  <a:srgbClr val="E7F0F3"/>
-                </a:solidFill>
-                <a:latin typeface="Arial"/>
-              </a:rPr>
-              <a:t>b</a:t>
-            </a:r>
-          </a:p>
-        </p:txBody>
-      </p:sp>
-      <p:sp>
-        <p:nvSpPr>
-          <p:cNvPr id="97" name="C4-E14 text 95" descr="sci-ppt:o095"/>
-          <p:cNvSpPr txBox="1"/>
-          <p:nvPr/>
-        </p:nvSpPr>
-        <p:spPr>
-          <a:xfrm>
-            <a:off x="8503920" y="3291840"/>
-            <a:ext cx="2743200" cy="365760"/>
-          </a:xfrm>
-          <a:prstGeom prst="rect">
-            <a:avLst/>
-          </a:prstGeom>
-          <a:noFill/>
-          <a:effectLst/>
-        </p:spPr>
-        <p:txBody>
-          <a:bodyPr wrap="square" lIns="27432" rIns="27432" tIns="18288" bIns="18288" anchor="ctr">
-            <a:spAutoFit/>
-          </a:bodyPr>
-          <a:lstStyle/>
-          <a:p>
-            <a:pPr algn="l">
-              <a:spcAft>
-                <a:spcPts val="0"/>
-              </a:spcAft>
-            </a:pPr>
-            <a:r>
-              <a:rPr sz="1800" b="0" i="0">
-                <a:solidFill>
-                  <a:srgbClr val="E7F0F3"/>
-                </a:solidFill>
-                <a:latin typeface="Arial"/>
-              </a:rPr>
-              <a:t>A_c = π b²</a:t>
-            </a:r>
-          </a:p>
-        </p:txBody>
-      </p:sp>
-      <p:sp>
-        <p:nvSpPr>
-          <p:cNvPr id="98" name="C4-E14 text 96" descr="sci-ppt:o096"/>
-          <p:cNvSpPr txBox="1"/>
-          <p:nvPr/>
-        </p:nvSpPr>
-        <p:spPr>
-          <a:xfrm>
-            <a:off x="685800" y="731520"/>
-            <a:ext cx="10972800" cy="365760"/>
-          </a:xfrm>
-          <a:prstGeom prst="rect">
-            <a:avLst/>
-          </a:prstGeom>
-          <a:noFill/>
-          <a:effectLst/>
-        </p:spPr>
-        <p:txBody>
-          <a:bodyPr wrap="square" lIns="27432" rIns="27432" tIns="18288" bIns="18288" anchor="ctr">
-            <a:spAutoFit/>
-          </a:bodyPr>
-          <a:lstStyle/>
-          <a:p>
-            <a:pPr algn="l">
-              <a:spcAft>
-                <a:spcPts val="0"/>
-              </a:spcAft>
-            </a:pPr>
-            <a:r>
-              <a:rPr sz="1800" b="0" i="0">
-                <a:solidFill>
-                  <a:srgbClr val="8EDBD4"/>
-                </a:solidFill>
-                <a:latin typeface="Arial"/>
-              </a:rPr>
-              <a:t>Clamped circular blister: w(b) = 0; w′(b) = 0; regular centre.</a:t>
-            </a:r>
-          </a:p>
-        </p:txBody>
-      </p:sp>
-      <p:cxnSp>
-        <p:nvCxnSpPr>
-          <p:cNvPr id="99" name="C4-E14 line 97" descr="sci-ppt:o097"/>
-          <p:cNvCxnSpPr/>
-          <p:nvPr/>
-        </p:nvCxnSpPr>
-        <p:spPr>
-          <a:xfrm>
-            <a:off x="274320" y="3977639"/>
-            <a:ext cx="11612880" cy="0"/>
-          </a:xfrm>
-          <a:prstGeom prst="line">
-            <a:avLst/>
-          </a:prstGeom>
-          <a:ln w="12700">
-            <a:solidFill>
-              <a:srgbClr val="405967"/>
-            </a:solidFill>
-          </a:ln>
-          <a:effectLst/>
-        </p:spPr>
-      </p:cxnSp>
-      <p:sp>
-        <p:nvSpPr>
-          <p:cNvPr id="100" name="C4-E14 text 98" descr="sci-ppt:o098"/>
-          <p:cNvSpPr txBox="1"/>
-          <p:nvPr/>
-        </p:nvSpPr>
-        <p:spPr>
-          <a:xfrm>
-            <a:off x="320040" y="4096512"/>
-            <a:ext cx="5715000" cy="246888"/>
-          </a:xfrm>
-          <a:prstGeom prst="rect">
-            <a:avLst/>
-          </a:prstGeom>
-          <a:noFill/>
-          <a:effectLst/>
-        </p:spPr>
-        <p:txBody>
-          <a:bodyPr wrap="square" lIns="27432" rIns="27432" tIns="18288" bIns="18288" anchor="ctr">
-            <a:spAutoFit/>
-          </a:bodyPr>
-          <a:lstStyle/>
-          <a:p>
-            <a:pPr algn="l">
-              <a:spcAft>
-                <a:spcPts val="0"/>
-              </a:spcAft>
-            </a:pPr>
-            <a:r>
-              <a:rPr sz="1150" b="0" i="0">
-                <a:solidFill>
-                  <a:srgbClr val="B4C7D2"/>
-                </a:solidFill>
-                <a:latin typeface="Arial"/>
-              </a:rPr>
-              <a:t>• p₀ → curvature forcing</a:t>
-            </a:r>
-          </a:p>
-        </p:txBody>
-      </p:sp>
-      <p:sp>
-        <p:nvSpPr>
-          <p:cNvPr id="101" name="C4-E14 text 99" descr="sci-ppt:o099"/>
-          <p:cNvSpPr txBox="1"/>
-          <p:nvPr/>
-        </p:nvSpPr>
-        <p:spPr>
-          <a:xfrm>
-            <a:off x="6217920" y="4096512"/>
-            <a:ext cx="5715000" cy="246888"/>
-          </a:xfrm>
-          <a:prstGeom prst="rect">
-            <a:avLst/>
-          </a:prstGeom>
-          <a:noFill/>
-          <a:effectLst/>
-        </p:spPr>
-        <p:txBody>
-          <a:bodyPr wrap="square" lIns="27432" rIns="27432" tIns="18288" bIns="18288" anchor="ctr">
-            <a:spAutoFit/>
-          </a:bodyPr>
-          <a:lstStyle/>
-          <a:p>
-            <a:pPr algn="l">
-              <a:spcAft>
-                <a:spcPts val="0"/>
-              </a:spcAft>
-            </a:pPr>
-            <a:r>
-              <a:rPr sz="1150" b="0" i="0">
-                <a:solidFill>
-                  <a:srgbClr val="B4C7D2"/>
-                </a:solidFill>
-                <a:latin typeface="Arial"/>
-              </a:rPr>
-              <a:t>• D_f — resistance</a:t>
-            </a:r>
-          </a:p>
-        </p:txBody>
-      </p:sp>
-      <p:sp>
-        <p:nvSpPr>
-          <p:cNvPr id="102" name="C4-E14 text 100" descr="sci-ppt:o100"/>
-          <p:cNvSpPr txBox="1"/>
-          <p:nvPr/>
-        </p:nvSpPr>
-        <p:spPr>
-          <a:xfrm>
-            <a:off x="320040" y="4329684"/>
-            <a:ext cx="5715000" cy="246888"/>
-          </a:xfrm>
-          <a:prstGeom prst="rect">
-            <a:avLst/>
-          </a:prstGeom>
-          <a:noFill/>
-          <a:effectLst/>
-        </p:spPr>
-        <p:txBody>
-          <a:bodyPr wrap="square" lIns="27432" rIns="27432" tIns="18288" bIns="18288" anchor="ctr">
-            <a:spAutoFit/>
-          </a:bodyPr>
-          <a:lstStyle/>
-          <a:p>
-            <a:pPr algn="l">
-              <a:spcAft>
-                <a:spcPts val="0"/>
-              </a:spcAft>
-            </a:pPr>
-            <a:r>
-              <a:rPr sz="1150" b="0" i="0">
-                <a:solidFill>
-                  <a:srgbClr val="B4C7D2"/>
-                </a:solidFill>
-                <a:latin typeface="Arial"/>
-              </a:rPr>
-              <a:t>• r, b — radial domain</a:t>
-            </a:r>
-          </a:p>
-        </p:txBody>
-      </p:sp>
-      <p:sp>
-        <p:nvSpPr>
-          <p:cNvPr id="103" name="C4-E14 text 101" descr="sci-ppt:o101"/>
-          <p:cNvSpPr txBox="1"/>
-          <p:nvPr/>
-        </p:nvSpPr>
-        <p:spPr>
-          <a:xfrm>
-            <a:off x="6217920" y="4329684"/>
-            <a:ext cx="5715000" cy="246888"/>
-          </a:xfrm>
-          <a:prstGeom prst="rect">
-            <a:avLst/>
-          </a:prstGeom>
-          <a:noFill/>
-          <a:effectLst/>
-        </p:spPr>
-        <p:txBody>
-          <a:bodyPr wrap="square" lIns="27432" rIns="27432" tIns="18288" bIns="18288" anchor="ctr">
-            <a:spAutoFit/>
-          </a:bodyPr>
-          <a:lstStyle/>
-          <a:p>
-            <a:pPr algn="l">
-              <a:spcAft>
-                <a:spcPts val="0"/>
-              </a:spcAft>
-            </a:pPr>
-            <a:r>
-              <a:rPr sz="1150" b="0" i="0">
-                <a:solidFill>
-                  <a:srgbClr val="B4C7D2"/>
-                </a:solidFill>
-                <a:latin typeface="Arial"/>
-              </a:rPr>
-              <a:t>• g(r), g′ — curvature fields</a:t>
-            </a:r>
-          </a:p>
-        </p:txBody>
-      </p:sp>
-      <p:sp>
-        <p:nvSpPr>
-          <p:cNvPr id="104" name="C4-E14 text 102" descr="sci-ppt:o102"/>
-          <p:cNvSpPr txBox="1"/>
-          <p:nvPr/>
-        </p:nvSpPr>
-        <p:spPr>
-          <a:xfrm>
-            <a:off x="320040" y="4562856"/>
-            <a:ext cx="5715000" cy="246888"/>
-          </a:xfrm>
-          <a:prstGeom prst="rect">
-            <a:avLst/>
-          </a:prstGeom>
-          <a:noFill/>
-          <a:effectLst/>
-        </p:spPr>
-        <p:txBody>
-          <a:bodyPr wrap="square" lIns="27432" rIns="27432" tIns="18288" bIns="18288" anchor="ctr">
-            <a:spAutoFit/>
-          </a:bodyPr>
-          <a:lstStyle/>
-          <a:p>
-            <a:pPr algn="l">
-              <a:spcAft>
-                <a:spcPts val="0"/>
-              </a:spcAft>
-            </a:pPr>
-            <a:r>
-              <a:rPr sz="1150" b="0" i="0">
-                <a:solidFill>
-                  <a:srgbClr val="B4C7D2"/>
-                </a:solidFill>
-                <a:latin typeface="Arial"/>
-              </a:rPr>
-              <a:t>• C₁ = 0 — centre regularity</a:t>
-            </a:r>
-          </a:p>
-        </p:txBody>
-      </p:sp>
-      <p:sp>
-        <p:nvSpPr>
-          <p:cNvPr id="105" name="C4-E14 text 103" descr="sci-ppt:o103"/>
-          <p:cNvSpPr txBox="1"/>
-          <p:nvPr/>
-        </p:nvSpPr>
-        <p:spPr>
-          <a:xfrm>
-            <a:off x="6217920" y="4562856"/>
-            <a:ext cx="5715000" cy="246888"/>
-          </a:xfrm>
-          <a:prstGeom prst="rect">
-            <a:avLst/>
-          </a:prstGeom>
-          <a:noFill/>
-          <a:effectLst/>
-        </p:spPr>
-        <p:txBody>
-          <a:bodyPr wrap="square" lIns="27432" rIns="27432" tIns="18288" bIns="18288" anchor="ctr">
-            <a:spAutoFit/>
-          </a:bodyPr>
-          <a:lstStyle/>
-          <a:p>
-            <a:pPr algn="l">
-              <a:spcAft>
-                <a:spcPts val="0"/>
-              </a:spcAft>
-            </a:pPr>
-            <a:r>
-              <a:rPr sz="1150" b="0" i="0">
-                <a:solidFill>
-                  <a:srgbClr val="B4C7D2"/>
-                </a:solidFill>
-                <a:latin typeface="Arial"/>
-              </a:rPr>
-              <a:t>• C₂ — remaining curvature offset</a:t>
-            </a:r>
-          </a:p>
-        </p:txBody>
-      </p:sp>
-      <p:sp>
-        <p:nvSpPr>
-          <p:cNvPr id="106" name="C4-E14 text 104" descr="sci-ppt:o104"/>
-          <p:cNvSpPr txBox="1"/>
-          <p:nvPr/>
-        </p:nvSpPr>
-        <p:spPr>
-          <a:xfrm>
-            <a:off x="320040" y="5596128"/>
-            <a:ext cx="11430000" cy="292608"/>
-          </a:xfrm>
-          <a:prstGeom prst="rect">
-            <a:avLst/>
-          </a:prstGeom>
-          <a:noFill/>
-          <a:effectLst/>
-        </p:spPr>
-        <p:txBody>
-          <a:bodyPr wrap="square" lIns="27432" rIns="27432" tIns="18288" bIns="18288" anchor="ctr">
-            <a:spAutoFit/>
-          </a:bodyPr>
-          <a:lstStyle/>
-          <a:p>
-            <a:pPr algn="l">
-              <a:spcAft>
-                <a:spcPts val="0"/>
-              </a:spcAft>
-            </a:pPr>
-            <a:r>
-              <a:rPr sz="1150" b="0" i="0">
-                <a:solidFill>
-                  <a:srgbClr val="8EDBD4"/>
-                </a:solidFill>
-                <a:latin typeface="Arial"/>
-              </a:rPr>
-              <a:t>An inverse-radius curvature gradient is rejected at the centre.</a:t>
-            </a:r>
-          </a:p>
-        </p:txBody>
-      </p:sp>
-      <p:sp>
-        <p:nvSpPr>
-          <p:cNvPr id="107" name="C4-E14 text 105" descr="sci-ppt:o105"/>
-          <p:cNvSpPr txBox="1"/>
-          <p:nvPr/>
-        </p:nvSpPr>
-        <p:spPr>
-          <a:xfrm>
-            <a:off x="320040" y="6473952"/>
-            <a:ext cx="11430000" cy="256032"/>
-          </a:xfrm>
-          <a:prstGeom prst="rect">
-            <a:avLst/>
-          </a:prstGeom>
-          <a:noFill/>
-          <a:effectLst/>
-        </p:spPr>
-        <p:txBody>
-          <a:bodyPr wrap="square" lIns="27432" rIns="27432" tIns="18288" bIns="18288" anchor="ctr">
+          <a:bodyPr wrap="none" lIns="18288" rIns="18288" tIns="18288" bIns="18288" anchor="t">
             <a:spAutoFit/>
           </a:bodyPr>
           <a:lstStyle/>
@@ -5731,7 +4976,7 @@
                 </a:solidFill>
                 <a:latin typeface="Arial"/>
               </a:rPr>
-              <a:t>Model schematic; geometry is not to scale.</a:t>
+              <a:t>Radial integration of Eq. C4-E14; the right plot is the C₁/r term for C₁ = 0.5 (schematic).</a:t>
             </a:r>
           </a:p>
         </p:txBody>
